--- a/exports/pptx/lessons/middle-module-02-panchabhuta/day-05-mid-module-check.pptx
+++ b/exports/pptx/lessons/middle-module-02-panchabhuta/day-05-mid-module-check.pptx
@@ -17,9 +17,10 @@
     <p:sldId id="265" r:id="rId11"/>
     <p:sldId id="266" r:id="rId12"/>
     <p:sldId id="267" r:id="rId13"/>
+    <p:sldId id="268" r:id="rId14"/>
   </p:sldIdLst>
   <p:notesMasterIdLst>
-    <p:notesMasterId r:id="rId14"/>
+    <p:notesMasterId r:id="rId15"/>
   </p:notesMasterIdLst>
   <p:sldSz cx="9144000" cy="5143500"/>
   <p:notesSz cx="5143500" cy="9144000"/>
@@ -801,6 +802,94 @@
             <a:fld id="{F7021451-1387-4CA6-816F-3879F97B5CBC}" type="slidenum">
               <a:rPr lang="en-US"/>
               <a:t>12</a:t>
+            </a:fld>
+            <a:endParaRPr lang="en-US"/>
+          </a:p>
+        </p:txBody>
+      </p:sp>
+    </p:spTree>
+    <p:extLst>
+      <p:ext uri="{BB962C8B-B14F-4D97-AF65-F5344CB8AC3E}">
+        <p14:creationId xmlns:p14="http://schemas.microsoft.com/office/powerpoint/2010/main" val="1024086991"/>
+      </p:ext>
+    </p:extLst>
+  </p:cSld>
+  <p:clrMapOvr>
+    <a:masterClrMapping/>
+  </p:clrMapOvr>
+</p:notes>
+</file>
+
+<file path=ppt/notesSlides/notesSlide13.xml><?xml version="1.0" encoding="utf-8"?>
+<p:notes xmlns:a="http://schemas.openxmlformats.org/drawingml/2006/main" xmlns:r="http://schemas.openxmlformats.org/officeDocument/2006/relationships" xmlns:p="http://schemas.openxmlformats.org/presentationml/2006/main">
+  <p:cSld>
+    <p:spTree>
+      <p:nvGrpSpPr>
+        <p:cNvPr id="1" name=""/>
+        <p:cNvGrpSpPr/>
+        <p:nvPr/>
+      </p:nvGrpSpPr>
+      <p:grpSpPr>
+        <a:xfrm>
+          <a:off x="0" y="0"/>
+          <a:ext cx="0" cy="0"/>
+          <a:chOff x="0" y="0"/>
+          <a:chExt cx="0" cy="0"/>
+        </a:xfrm>
+      </p:grpSpPr>
+      <p:sp>
+        <p:nvSpPr>
+          <p:cNvPr id="2" name="Slide Image Placeholder 1"/>
+          <p:cNvSpPr>
+            <a:spLocks noGrp="1" noRot="1" noChangeAspect="1"/>
+          </p:cNvSpPr>
+          <p:nvPr>
+            <p:ph type="sldImg"/>
+          </p:nvPr>
+        </p:nvSpPr>
+        <p:spPr/>
+      </p:sp>
+      <p:sp>
+        <p:nvSpPr>
+          <p:cNvPr id="3" name="Notes Placeholder 2"/>
+          <p:cNvSpPr>
+            <a:spLocks noGrp="1"/>
+          </p:cNvSpPr>
+          <p:nvPr>
+            <p:ph type="body" idx="1"/>
+          </p:nvPr>
+        </p:nvSpPr>
+        <p:spPr/>
+        <p:txBody>
+          <a:bodyPr/>
+          <a:lstStyle/>
+          <a:p>
+            <a:r>
+              <a:rPr lang="en-US" dirty="0"/>
+              <a:t/>
+            </a:r>
+            <a:endParaRPr lang="en-US" dirty="0"/>
+          </a:p>
+        </p:txBody>
+      </p:sp>
+      <p:sp>
+        <p:nvSpPr>
+          <p:cNvPr id="4" name="Slide Number Placeholder 3"/>
+          <p:cNvSpPr>
+            <a:spLocks noGrp="1"/>
+          </p:cNvSpPr>
+          <p:nvPr>
+            <p:ph type="sldNum" sz="quarter" idx="10"/>
+          </p:nvPr>
+        </p:nvSpPr>
+        <p:spPr/>
+        <p:txBody>
+          <a:bodyPr/>
+          <a:lstStyle/>
+          <a:p>
+            <a:fld id="{F7021451-1387-4CA6-816F-3879F97B5CBC}" type="slidenum">
+              <a:rPr lang="en-US"/>
+              <a:t>13</a:t>
             </a:fld>
             <a:endParaRPr lang="en-US"/>
           </a:p>
@@ -2100,102 +2189,6 @@
         </p:nvSpPr>
         <p:spPr>
           <a:xfrm>
-            <a:off x="406301" y="1223963"/>
-            <a:ext cx="8498026" cy="274290"/>
-          </a:xfrm>
-          <a:prstGeom prst="rect">
-            <a:avLst/>
-          </a:prstGeom>
-          <a:noFill/>
-          <a:ln/>
-        </p:spPr>
-        <p:txBody>
-          <a:bodyPr wrap="square" lIns="0" tIns="0" rIns="0" bIns="0" rtlCol="0" anchor="t"/>
-          <a:lstStyle/>
-          <a:p>
-            <a:pPr algn="l" indent="0" marL="0">
-              <a:lnSpc>
-                <a:spcPts val="2160"/>
-              </a:lnSpc>
-              <a:spcBef>
-                <a:spcPts val="600"/>
-              </a:spcBef>
-              <a:spcAft>
-                <a:spcPts val="800"/>
-              </a:spcAft>
-              <a:buNone/>
-            </a:pPr>
-            <a:r>
-              <a:rPr lang="en-US" sz="1800" b="1" dirty="0">
-                <a:solidFill>
-                  <a:srgbClr val="FE4447"/>
-                </a:solidFill>
-                <a:latin typeface="Georgia" pitchFamily="34" charset="0"/>
-                <a:ea typeface="Georgia" pitchFamily="34" charset="-122"/>
-                <a:cs typeface="Georgia" pitchFamily="34" charset="-120"/>
-              </a:rPr>
-              <a:t>Learning objective</a:t>
-            </a:r>
-            <a:endParaRPr lang="en-US" sz="1800" dirty="0"/>
-          </a:p>
-        </p:txBody>
-      </p:sp>
-      <p:sp>
-        <p:nvSpPr>
-          <p:cNvPr id="6" name="Text 4"/>
-          <p:cNvSpPr/>
-          <p:nvPr/>
-        </p:nvSpPr>
-        <p:spPr>
-          <a:xfrm>
-            <a:off x="406301" y="1637854"/>
-            <a:ext cx="8498026" cy="426541"/>
-          </a:xfrm>
-          <a:prstGeom prst="rect">
-            <a:avLst/>
-          </a:prstGeom>
-          <a:noFill/>
-          <a:ln/>
-        </p:spPr>
-        <p:txBody>
-          <a:bodyPr wrap="square" lIns="0" tIns="0" rIns="0" bIns="0" rtlCol="0" anchor="t"/>
-          <a:lstStyle/>
-          <a:p>
-            <a:pPr algn="l" indent="0" marL="0">
-              <a:lnSpc>
-                <a:spcPts val="1680"/>
-              </a:lnSpc>
-              <a:spcBef>
-                <a:spcPts val="300"/>
-              </a:spcBef>
-              <a:spcAft>
-                <a:spcPts val="300"/>
-              </a:spcAft>
-              <a:buNone/>
-            </a:pPr>
-            <a:r>
-              <a:rPr lang="en-US" sz="1200" dirty="0">
-                <a:solidFill>
-                  <a:srgbClr val="1C2833"/>
-                </a:solidFill>
-                <a:latin typeface="Arial" pitchFamily="34" charset="0"/>
-                <a:ea typeface="Arial" pitchFamily="34" charset="-122"/>
-                <a:cs typeface="Arial" pitchFamily="34" charset="-120"/>
-              </a:rPr>
-              <a:t>By the end of this lesson, students will demonstrate working recall of all five elements, their qualities, and the creation sequence, and will commit to a project topic and partner.</a:t>
-            </a:r>
-            <a:endParaRPr lang="en-US" sz="1200" dirty="0"/>
-          </a:p>
-        </p:txBody>
-      </p:sp>
-      <p:sp>
-        <p:nvSpPr>
-          <p:cNvPr id="7" name="Text 5"/>
-          <p:cNvSpPr/>
-          <p:nvPr/>
-        </p:nvSpPr>
-        <p:spPr>
-          <a:xfrm>
             <a:off x="406301" y="4434929"/>
             <a:ext cx="8498026" cy="213271"/>
           </a:xfrm>
@@ -2340,7 +2333,7 @@
                 <a:ea typeface="Georgia" pitchFamily="34" charset="-122"/>
                 <a:cs typeface="Georgia" pitchFamily="34" charset="-120"/>
               </a:rPr>
-              <a:t>Differentiation</a:t>
+              <a:t>Homework</a:t>
             </a:r>
             <a:endParaRPr lang="en-US" sz="1800" dirty="0"/>
           </a:p>
@@ -2378,26 +2371,6 @@
               <a:buChar char="•"/>
             </a:pPr>
             <a:r>
-              <a:rPr lang="en-US" sz="1200" b="1" dirty="0">
-                <a:solidFill>
-                  <a:srgbClr val="1C2833"/>
-                </a:solidFill>
-                <a:latin typeface="Arial" pitchFamily="34" charset="0"/>
-                <a:ea typeface="Arial" pitchFamily="34" charset="-122"/>
-                <a:cs typeface="Arial" pitchFamily="34" charset="-120"/>
-              </a:rPr>
-              <a:t>One tier up:</a:t>
-            </a:r>
-            <a:pPr algn="l" indent="0" marL="0">
-              <a:lnSpc>
-                <a:spcPts val="1620"/>
-              </a:lnSpc>
-              <a:spcAft>
-                <a:spcPts val="300"/>
-              </a:spcAft>
-              <a:buNone/>
-            </a:pPr>
-            <a:r>
               <a:rPr lang="en-US" sz="1200" dirty="0">
                 <a:solidFill>
                   <a:srgbClr val="1C2833"/>
@@ -2406,47 +2379,7 @@
                 <a:ea typeface="Arial" pitchFamily="34" charset="-122"/>
                 <a:cs typeface="Arial" pitchFamily="34" charset="-120"/>
               </a:rPr>
-              <a:t> A pair tackling space (</a:t>
-            </a:r>
-            <a:pPr algn="l" indent="0" marL="0">
-              <a:lnSpc>
-                <a:spcPts val="1620"/>
-              </a:lnSpc>
-              <a:spcAft>
-                <a:spcPts val="300"/>
-              </a:spcAft>
-              <a:buNone/>
-            </a:pPr>
-            <a:r>
-              <a:rPr lang="en-US" sz="1200" i="1" dirty="0">
-                <a:solidFill>
-                  <a:srgbClr val="1C2833"/>
-                </a:solidFill>
-                <a:latin typeface="Arial" pitchFamily="34" charset="0"/>
-                <a:ea typeface="Arial" pitchFamily="34" charset="-122"/>
-                <a:cs typeface="Arial" pitchFamily="34" charset="-120"/>
-              </a:rPr>
-              <a:t>ākāśa</a:t>
-            </a:r>
-            <a:pPr algn="l" indent="0" marL="0">
-              <a:lnSpc>
-                <a:spcPts val="1620"/>
-              </a:lnSpc>
-              <a:spcAft>
-                <a:spcPts val="300"/>
-              </a:spcAft>
-              <a:buNone/>
-            </a:pPr>
-            <a:r>
-              <a:rPr lang="en-US" sz="1200" dirty="0">
-                <a:solidFill>
-                  <a:srgbClr val="1C2833"/>
-                </a:solidFill>
-                <a:latin typeface="Arial" pitchFamily="34" charset="0"/>
-                <a:ea typeface="Arial" pitchFamily="34" charset="-122"/>
-                <a:cs typeface="Arial" pitchFamily="34" charset="-120"/>
-              </a:rPr>
-              <a:t>) — challenge: how do you make a poster about emptiness? Force the constraint and find a creative answer.</a:t>
+              <a:t>Submit project plan in writing by next morning. Format: 1 paragraph stating element, format, and what audience will see/hear/feel.</a:t>
             </a:r>
             <a:endParaRPr lang="en-US" sz="1200" dirty="0"/>
           </a:p>
@@ -2462,26 +2395,6 @@
               <a:buChar char="•"/>
             </a:pPr>
             <a:r>
-              <a:rPr lang="en-US" sz="1200" b="1" dirty="0">
-                <a:solidFill>
-                  <a:srgbClr val="1C2833"/>
-                </a:solidFill>
-                <a:latin typeface="Arial" pitchFamily="34" charset="0"/>
-                <a:ea typeface="Arial" pitchFamily="34" charset="-122"/>
-                <a:cs typeface="Arial" pitchFamily="34" charset="-120"/>
-              </a:rPr>
-              <a:t>One tier down:</a:t>
-            </a:r>
-            <a:pPr algn="l" indent="0" marL="0">
-              <a:lnSpc>
-                <a:spcPts val="1620"/>
-              </a:lnSpc>
-              <a:spcAft>
-                <a:spcPts val="300"/>
-              </a:spcAft>
-              <a:buNone/>
-            </a:pPr>
-            <a:r>
               <a:rPr lang="en-US" sz="1200" dirty="0">
                 <a:solidFill>
                   <a:srgbClr val="1C2833"/>
@@ -2490,7 +2403,7 @@
                 <a:ea typeface="Arial" pitchFamily="34" charset="-122"/>
                 <a:cs typeface="Arial" pitchFamily="34" charset="-120"/>
               </a:rPr>
-              <a:t> Allow individual work with teacher check-ins every 10 minutes during Days 8–9.</a:t>
+              <a:t>Begin gathering project materials.</a:t>
             </a:r>
             <a:endParaRPr lang="en-US" sz="1200" dirty="0"/>
           </a:p>
@@ -2648,7 +2561,7 @@
                 <a:ea typeface="Georgia" pitchFamily="34" charset="-122"/>
                 <a:cs typeface="Georgia" pitchFamily="34" charset="-120"/>
               </a:rPr>
-              <a:t>Teacher notes</a:t>
+              <a:t>Differentiation</a:t>
             </a:r>
             <a:endParaRPr lang="en-US" sz="1800" dirty="0"/>
           </a:p>
@@ -2662,8 +2575,8 @@
         </p:nvSpPr>
         <p:spPr>
           <a:xfrm>
-            <a:off x="406301" y="870942"/>
-            <a:ext cx="8498026" cy="853083"/>
+            <a:off x="634901" y="883593"/>
+            <a:ext cx="8102798" cy="731341"/>
           </a:xfrm>
           <a:prstGeom prst="rect">
             <a:avLst/>
@@ -2675,13 +2588,31 @@
           <a:bodyPr wrap="square" lIns="0" tIns="0" rIns="0" bIns="0" rtlCol="0" anchor="t"/>
           <a:lstStyle/>
           <a:p>
-            <a:pPr algn="l" indent="0" marL="0">
-              <a:lnSpc>
-                <a:spcPts val="1680"/>
-              </a:lnSpc>
-              <a:spcBef>
-                <a:spcPts val="300"/>
-              </a:spcBef>
+            <a:pPr algn="l" marL="342900" indent="-342900">
+              <a:lnSpc>
+                <a:spcPts val="1620"/>
+              </a:lnSpc>
+              <a:spcAft>
+                <a:spcPts val="300"/>
+              </a:spcAft>
+              <a:buSzPct val="100000"/>
+              <a:buChar char="•"/>
+            </a:pPr>
+            <a:r>
+              <a:rPr lang="en-US" sz="1200" b="1" dirty="0">
+                <a:solidFill>
+                  <a:srgbClr val="1C2833"/>
+                </a:solidFill>
+                <a:latin typeface="Arial" pitchFamily="34" charset="0"/>
+                <a:ea typeface="Arial" pitchFamily="34" charset="-122"/>
+                <a:cs typeface="Arial" pitchFamily="34" charset="-120"/>
+              </a:rPr>
+              <a:t>One tier up:</a:t>
+            </a:r>
+            <a:pPr algn="l" indent="0" marL="0">
+              <a:lnSpc>
+                <a:spcPts val="1620"/>
+              </a:lnSpc>
               <a:spcAft>
                 <a:spcPts val="300"/>
               </a:spcAft>
@@ -2696,7 +2627,91 @@
                 <a:ea typeface="Arial" pitchFamily="34" charset="-122"/>
                 <a:cs typeface="Arial" pitchFamily="34" charset="-120"/>
               </a:rPr>
-              <a:t>– Grade the formative quiz tonight and walk in tomorrow knowing who is shaky on the creation sequence vs. who is shaky on the tanmātra mapping. The two error patterns need different reteaching. – If too many pairs cluster on one element (e.g. 6 pairs on fire), gently broker — "groups 4 and 5, would you consider switching to space or air? You'll have less competition for attention on presentation day."</a:t>
+              <a:t> A pair tackling space (</a:t>
+            </a:r>
+            <a:pPr algn="l" indent="0" marL="0">
+              <a:lnSpc>
+                <a:spcPts val="1620"/>
+              </a:lnSpc>
+              <a:spcAft>
+                <a:spcPts val="300"/>
+              </a:spcAft>
+              <a:buNone/>
+            </a:pPr>
+            <a:r>
+              <a:rPr lang="en-US" sz="1200" i="1" dirty="0">
+                <a:solidFill>
+                  <a:srgbClr val="1C2833"/>
+                </a:solidFill>
+                <a:latin typeface="Arial" pitchFamily="34" charset="0"/>
+                <a:ea typeface="Arial" pitchFamily="34" charset="-122"/>
+                <a:cs typeface="Arial" pitchFamily="34" charset="-120"/>
+              </a:rPr>
+              <a:t>ākāśa</a:t>
+            </a:r>
+            <a:pPr algn="l" indent="0" marL="0">
+              <a:lnSpc>
+                <a:spcPts val="1620"/>
+              </a:lnSpc>
+              <a:spcAft>
+                <a:spcPts val="300"/>
+              </a:spcAft>
+              <a:buNone/>
+            </a:pPr>
+            <a:r>
+              <a:rPr lang="en-US" sz="1200" dirty="0">
+                <a:solidFill>
+                  <a:srgbClr val="1C2833"/>
+                </a:solidFill>
+                <a:latin typeface="Arial" pitchFamily="34" charset="0"/>
+                <a:ea typeface="Arial" pitchFamily="34" charset="-122"/>
+                <a:cs typeface="Arial" pitchFamily="34" charset="-120"/>
+              </a:rPr>
+              <a:t>) — challenge: how do you make a poster about emptiness? Force the constraint and find a creative answer.</a:t>
+            </a:r>
+            <a:endParaRPr lang="en-US" sz="1200" dirty="0"/>
+          </a:p>
+          <a:p>
+            <a:pPr algn="l" marL="342900" indent="-342900">
+              <a:lnSpc>
+                <a:spcPts val="1620"/>
+              </a:lnSpc>
+              <a:spcAft>
+                <a:spcPts val="300"/>
+              </a:spcAft>
+              <a:buSzPct val="100000"/>
+              <a:buChar char="•"/>
+            </a:pPr>
+            <a:r>
+              <a:rPr lang="en-US" sz="1200" b="1" dirty="0">
+                <a:solidFill>
+                  <a:srgbClr val="1C2833"/>
+                </a:solidFill>
+                <a:latin typeface="Arial" pitchFamily="34" charset="0"/>
+                <a:ea typeface="Arial" pitchFamily="34" charset="-122"/>
+                <a:cs typeface="Arial" pitchFamily="34" charset="-120"/>
+              </a:rPr>
+              <a:t>One tier down:</a:t>
+            </a:r>
+            <a:pPr algn="l" indent="0" marL="0">
+              <a:lnSpc>
+                <a:spcPts val="1620"/>
+              </a:lnSpc>
+              <a:spcAft>
+                <a:spcPts val="300"/>
+              </a:spcAft>
+              <a:buNone/>
+            </a:pPr>
+            <a:r>
+              <a:rPr lang="en-US" sz="1200" dirty="0">
+                <a:solidFill>
+                  <a:srgbClr val="1C2833"/>
+                </a:solidFill>
+                <a:latin typeface="Arial" pitchFamily="34" charset="0"/>
+                <a:ea typeface="Arial" pitchFamily="34" charset="-122"/>
+                <a:cs typeface="Arial" pitchFamily="34" charset="-120"/>
+              </a:rPr>
+              <a:t> Allow individual work with teacher check-ins every 10 minutes during Days 8–9.</a:t>
             </a:r>
             <a:endParaRPr lang="en-US" sz="1200" dirty="0"/>
           </a:p>
@@ -2854,7 +2869,7 @@
                 <a:ea typeface="Georgia" pitchFamily="34" charset="-122"/>
                 <a:cs typeface="Georgia" pitchFamily="34" charset="-120"/>
               </a:rPr>
-              <a:t>Citation(s) used in this lesson</a:t>
+              <a:t>Teacher notes</a:t>
             </a:r>
             <a:endParaRPr lang="en-US" sz="1800" dirty="0"/>
           </a:p>
@@ -2868,7 +2883,77 @@
         </p:nvSpPr>
         <p:spPr>
           <a:xfrm>
-            <a:off x="406301" y="870942"/>
+            <a:off x="634901" y="883593"/>
+            <a:ext cx="8102798" cy="937022"/>
+          </a:xfrm>
+          <a:prstGeom prst="rect">
+            <a:avLst/>
+          </a:prstGeom>
+          <a:noFill/>
+          <a:ln/>
+        </p:spPr>
+        <p:txBody>
+          <a:bodyPr wrap="square" lIns="0" tIns="0" rIns="0" bIns="0" rtlCol="0" anchor="t"/>
+          <a:lstStyle/>
+          <a:p>
+            <a:pPr algn="l" marL="342900" indent="-342900">
+              <a:lnSpc>
+                <a:spcPts val="1620"/>
+              </a:lnSpc>
+              <a:spcAft>
+                <a:spcPts val="300"/>
+              </a:spcAft>
+              <a:buSzPct val="100000"/>
+              <a:buChar char="•"/>
+            </a:pPr>
+            <a:r>
+              <a:rPr lang="en-US" sz="1200" dirty="0">
+                <a:solidFill>
+                  <a:srgbClr val="1C2833"/>
+                </a:solidFill>
+                <a:latin typeface="Arial" pitchFamily="34" charset="0"/>
+                <a:ea typeface="Arial" pitchFamily="34" charset="-122"/>
+                <a:cs typeface="Arial" pitchFamily="34" charset="-120"/>
+              </a:rPr>
+              <a:t>Grade the formative quiz tonight and walk in tomorrow knowing who is shaky on the creation sequence vs. who is shaky on the tanmātra mapping. The two error patterns need different reteaching.</a:t>
+            </a:r>
+            <a:endParaRPr lang="en-US" sz="1200" dirty="0"/>
+          </a:p>
+          <a:p>
+            <a:pPr algn="l" marL="342900" indent="-342900">
+              <a:lnSpc>
+                <a:spcPts val="1620"/>
+              </a:lnSpc>
+              <a:spcAft>
+                <a:spcPts val="300"/>
+              </a:spcAft>
+              <a:buSzPct val="100000"/>
+              <a:buChar char="•"/>
+            </a:pPr>
+            <a:r>
+              <a:rPr lang="en-US" sz="1200" dirty="0">
+                <a:solidFill>
+                  <a:srgbClr val="1C2833"/>
+                </a:solidFill>
+                <a:latin typeface="Arial" pitchFamily="34" charset="0"/>
+                <a:ea typeface="Arial" pitchFamily="34" charset="-122"/>
+                <a:cs typeface="Arial" pitchFamily="34" charset="-120"/>
+              </a:rPr>
+              <a:t>If too many pairs cluster on one element (e.g. 6 pairs on fire), gently broker — "groups 4 and 5, would you consider switching to space or air? You'll have less competition for attention on presentation day."</a:t>
+            </a:r>
+            <a:endParaRPr lang="en-US" sz="1200" dirty="0"/>
+          </a:p>
+        </p:txBody>
+      </p:sp>
+      <p:sp>
+        <p:nvSpPr>
+          <p:cNvPr id="5" name="Text 3"/>
+          <p:cNvSpPr/>
+          <p:nvPr/>
+        </p:nvSpPr>
+        <p:spPr>
+          <a:xfrm>
+            <a:off x="406301" y="4434929"/>
             <a:ext cx="8498026" cy="213271"/>
           </a:xfrm>
           <a:prstGeom prst="rect">
@@ -2902,7 +2987,163 @@
                 <a:ea typeface="Arial" pitchFamily="34" charset="-122"/>
                 <a:cs typeface="Arial" pitchFamily="34" charset="-120"/>
               </a:rPr>
-              <a:t>– No new citations introduced.</a:t>
+              <a:t>Middle ·  · IKS Curriculum</a:t>
+            </a:r>
+            <a:endParaRPr lang="en-US" sz="1200" dirty="0"/>
+          </a:p>
+        </p:txBody>
+      </p:sp>
+    </p:spTree>
+  </p:cSld>
+  <p:clrMapOvr>
+    <a:masterClrMapping/>
+  </p:clrMapOvr>
+</p:sld>
+</file>
+
+<file path=ppt/slides/slide13.xml><?xml version="1.0" encoding="utf-8"?>
+<p:sld xmlns:a="http://schemas.openxmlformats.org/drawingml/2006/main" xmlns:r="http://schemas.openxmlformats.org/officeDocument/2006/relationships" xmlns:p="http://schemas.openxmlformats.org/presentationml/2006/main">
+  <p:cSld name="Slide 13">
+    <p:bg>
+      <p:bgPr>
+        <a:solidFill>
+          <a:srgbClr val="FFFFFF"/>
+        </a:solidFill>
+      </p:bgPr>
+    </p:bg>
+    <p:spTree>
+      <p:nvGrpSpPr>
+        <p:cNvPr id="1" name=""/>
+        <p:cNvGrpSpPr/>
+        <p:nvPr/>
+      </p:nvGrpSpPr>
+      <p:grpSpPr>
+        <a:xfrm>
+          <a:off x="0" y="0"/>
+          <a:ext cx="0" cy="0"/>
+          <a:chOff x="0" y="0"/>
+          <a:chExt cx="0" cy="0"/>
+        </a:xfrm>
+      </p:grpSpPr>
+      <p:sp>
+        <p:nvSpPr>
+          <p:cNvPr id="2" name="Text 0"/>
+          <p:cNvSpPr/>
+          <p:nvPr/>
+        </p:nvSpPr>
+        <p:spPr>
+          <a:xfrm>
+            <a:off x="0" y="0"/>
+            <a:ext cx="9144000" cy="101501"/>
+          </a:xfrm>
+          <a:prstGeom prst="rect">
+            <a:avLst/>
+          </a:prstGeom>
+          <a:solidFill>
+            <a:srgbClr val="277884"/>
+          </a:solidFill>
+          <a:ln/>
+        </p:spPr>
+        <p:txBody>
+          <a:bodyPr wrap="square" rtlCol="0" anchor="ctr"/>
+          <a:lstStyle/>
+          <a:p>
+            <a:pPr indent="0" marL="0">
+              <a:buNone/>
+            </a:pPr>
+            <a:endParaRPr lang="en-US" dirty="0"/>
+          </a:p>
+        </p:txBody>
+      </p:sp>
+      <p:sp>
+        <p:nvSpPr>
+          <p:cNvPr id="3" name="Text 1"/>
+          <p:cNvSpPr/>
+          <p:nvPr/>
+        </p:nvSpPr>
+        <p:spPr>
+          <a:xfrm>
+            <a:off x="406301" y="457051"/>
+            <a:ext cx="8498026" cy="274290"/>
+          </a:xfrm>
+          <a:prstGeom prst="rect">
+            <a:avLst/>
+          </a:prstGeom>
+          <a:noFill/>
+          <a:ln/>
+        </p:spPr>
+        <p:txBody>
+          <a:bodyPr wrap="square" lIns="0" tIns="0" rIns="0" bIns="0" rtlCol="0" anchor="t"/>
+          <a:lstStyle/>
+          <a:p>
+            <a:pPr algn="l" indent="0" marL="0">
+              <a:lnSpc>
+                <a:spcPts val="2160"/>
+              </a:lnSpc>
+              <a:spcBef>
+                <a:spcPts val="600"/>
+              </a:spcBef>
+              <a:spcAft>
+                <a:spcPts val="800"/>
+              </a:spcAft>
+              <a:buNone/>
+            </a:pPr>
+            <a:r>
+              <a:rPr lang="en-US" sz="1800" b="1" dirty="0">
+                <a:solidFill>
+                  <a:srgbClr val="FE4447"/>
+                </a:solidFill>
+                <a:latin typeface="Georgia" pitchFamily="34" charset="0"/>
+                <a:ea typeface="Georgia" pitchFamily="34" charset="-122"/>
+                <a:cs typeface="Georgia" pitchFamily="34" charset="-120"/>
+              </a:rPr>
+              <a:t>Citation(s) used in this lesson</a:t>
+            </a:r>
+            <a:endParaRPr lang="en-US" sz="1800" dirty="0"/>
+          </a:p>
+        </p:txBody>
+      </p:sp>
+      <p:sp>
+        <p:nvSpPr>
+          <p:cNvPr id="4" name="Text 2"/>
+          <p:cNvSpPr/>
+          <p:nvPr/>
+        </p:nvSpPr>
+        <p:spPr>
+          <a:xfrm>
+            <a:off x="634901" y="883593"/>
+            <a:ext cx="8102798" cy="281880"/>
+          </a:xfrm>
+          <a:prstGeom prst="rect">
+            <a:avLst/>
+          </a:prstGeom>
+          <a:noFill/>
+          <a:ln/>
+        </p:spPr>
+        <p:txBody>
+          <a:bodyPr wrap="square" lIns="0" tIns="0" rIns="0" bIns="0" rtlCol="0" anchor="t"/>
+          <a:lstStyle/>
+          <a:p>
+            <a:pPr algn="l" marL="342900" indent="-342900">
+              <a:lnSpc>
+                <a:spcPts val="1620"/>
+              </a:lnSpc>
+              <a:spcAft>
+                <a:spcPts val="300"/>
+              </a:spcAft>
+              <a:buSzPct val="100000"/>
+              <a:buChar char="•"/>
+            </a:pPr>
+            <a:r>
+              <a:rPr lang="en-US" sz="1200" dirty="0">
+                <a:solidFill>
+                  <a:srgbClr val="1C2833"/>
+                </a:solidFill>
+                <a:latin typeface="Arial" pitchFamily="34" charset="0"/>
+                <a:ea typeface="Arial" pitchFamily="34" charset="-122"/>
+                <a:cs typeface="Arial" pitchFamily="34" charset="-120"/>
+              </a:rPr>
+              <a:t>No new citations introduced.</a:t>
             </a:r>
             <a:endParaRPr lang="en-US" sz="1200" dirty="0"/>
           </a:p>
@@ -3060,7 +3301,7 @@
                 <a:ea typeface="Georgia" pitchFamily="34" charset="-122"/>
                 <a:cs typeface="Georgia" pitchFamily="34" charset="-120"/>
               </a:rPr>
-              <a:t>Materials</a:t>
+              <a:t>Learning objective</a:t>
             </a:r>
             <a:endParaRPr lang="en-US" sz="1800" dirty="0"/>
           </a:p>
@@ -3075,7 +3316,7 @@
         <p:spPr>
           <a:xfrm>
             <a:off x="406301" y="870942"/>
-            <a:ext cx="8498026" cy="445591"/>
+            <a:ext cx="8498026" cy="426541"/>
           </a:xfrm>
           <a:prstGeom prst="rect">
             <a:avLst/>
@@ -3108,99 +3349,7 @@
                 <a:ea typeface="Arial" pitchFamily="34" charset="-122"/>
                 <a:cs typeface="Arial" pitchFamily="34" charset="-120"/>
               </a:rPr>
-              <a:t>– Printed formative quiz (5 questions, see </a:t>
-            </a:r>
-            <a:pPr algn="l" indent="0" marL="0">
-              <a:lnSpc>
-                <a:spcPts val="1680"/>
-              </a:lnSpc>
-              <a:spcBef>
-                <a:spcPts val="300"/>
-              </a:spcBef>
-              <a:spcAft>
-                <a:spcPts val="300"/>
-              </a:spcAft>
-              <a:buNone/>
-            </a:pPr>
-            <a:r>
-              <a:rPr lang="en-US" sz="1200" dirty="0">
-                <a:solidFill>
-                  <a:srgbClr val="1C2833"/>
-                </a:solidFill>
-                <a:latin typeface="Arial" pitchFamily="34" charset="0"/>
-                <a:ea typeface="Arial" pitchFamily="34" charset="-122"/>
-                <a:cs typeface="Arial" pitchFamily="34" charset="-120"/>
-              </a:rPr>
-              <a:t>quizzes/formative.md</a:t>
-            </a:r>
-            <a:pPr algn="l" indent="0" marL="0">
-              <a:lnSpc>
-                <a:spcPts val="1680"/>
-              </a:lnSpc>
-              <a:spcBef>
-                <a:spcPts val="300"/>
-              </a:spcBef>
-              <a:spcAft>
-                <a:spcPts val="300"/>
-              </a:spcAft>
-              <a:buNone/>
-            </a:pPr>
-            <a:r>
-              <a:rPr lang="en-US" sz="1200" dirty="0">
-                <a:solidFill>
-                  <a:srgbClr val="1C2833"/>
-                </a:solidFill>
-                <a:latin typeface="Arial" pitchFamily="34" charset="0"/>
-                <a:ea typeface="Arial" pitchFamily="34" charset="-122"/>
-                <a:cs typeface="Arial" pitchFamily="34" charset="-120"/>
-              </a:rPr>
-              <a:t> Part B) — one per student. – Sample project briefs (see </a:t>
-            </a:r>
-            <a:pPr algn="l" indent="0" marL="0">
-              <a:lnSpc>
-                <a:spcPts val="1680"/>
-              </a:lnSpc>
-              <a:spcBef>
-                <a:spcPts val="300"/>
-              </a:spcBef>
-              <a:spcAft>
-                <a:spcPts val="300"/>
-              </a:spcAft>
-              <a:buNone/>
-            </a:pPr>
-            <a:r>
-              <a:rPr lang="en-US" sz="1200" dirty="0">
-                <a:solidFill>
-                  <a:srgbClr val="1C2833"/>
-                </a:solidFill>
-                <a:latin typeface="Arial" pitchFamily="34" charset="0"/>
-                <a:ea typeface="Arial" pitchFamily="34" charset="-122"/>
-                <a:cs typeface="Arial" pitchFamily="34" charset="-120"/>
-              </a:rPr>
-              <a:t>assessments/project-brief.md</a:t>
-            </a:r>
-            <a:pPr algn="l" indent="0" marL="0">
-              <a:lnSpc>
-                <a:spcPts val="1680"/>
-              </a:lnSpc>
-              <a:spcBef>
-                <a:spcPts val="300"/>
-              </a:spcBef>
-              <a:spcAft>
-                <a:spcPts val="300"/>
-              </a:spcAft>
-              <a:buNone/>
-            </a:pPr>
-            <a:r>
-              <a:rPr lang="en-US" sz="1200" dirty="0">
-                <a:solidFill>
-                  <a:srgbClr val="1C2833"/>
-                </a:solidFill>
-                <a:latin typeface="Arial" pitchFamily="34" charset="0"/>
-                <a:ea typeface="Arial" pitchFamily="34" charset="-122"/>
-                <a:cs typeface="Arial" pitchFamily="34" charset="-120"/>
-              </a:rPr>
-              <a:t>) — one per pair. – Sticky notes (3 per student).</a:t>
+              <a:t>By the end of this lesson, students will demonstrate working recall of all five elements, their qualities, and the creation sequence, and will commit to a project topic and partner.</a:t>
             </a:r>
             <a:endParaRPr lang="en-US" sz="1200" dirty="0"/>
           </a:p>
@@ -3358,7 +3507,7 @@
                 <a:ea typeface="Georgia" pitchFamily="34" charset="-122"/>
                 <a:cs typeface="Georgia" pitchFamily="34" charset="-120"/>
               </a:rPr>
-              <a:t>Lesson flow</a:t>
+              <a:t>Materials</a:t>
             </a:r>
             <a:endParaRPr lang="en-US" sz="1800" dirty="0"/>
           </a:p>
@@ -3367,6 +3516,180 @@
       <p:sp>
         <p:nvSpPr>
           <p:cNvPr id="4" name="Text 2"/>
+          <p:cNvSpPr/>
+          <p:nvPr/>
+        </p:nvSpPr>
+        <p:spPr>
+          <a:xfrm>
+            <a:off x="634901" y="883593"/>
+            <a:ext cx="8102798" cy="807541"/>
+          </a:xfrm>
+          <a:prstGeom prst="rect">
+            <a:avLst/>
+          </a:prstGeom>
+          <a:noFill/>
+          <a:ln/>
+        </p:spPr>
+        <p:txBody>
+          <a:bodyPr wrap="square" lIns="0" tIns="0" rIns="0" bIns="0" rtlCol="0" anchor="t"/>
+          <a:lstStyle/>
+          <a:p>
+            <a:pPr algn="l" marL="342900" indent="-342900">
+              <a:lnSpc>
+                <a:spcPts val="1620"/>
+              </a:lnSpc>
+              <a:spcAft>
+                <a:spcPts val="300"/>
+              </a:spcAft>
+              <a:buSzPct val="100000"/>
+              <a:buChar char="•"/>
+            </a:pPr>
+            <a:r>
+              <a:rPr lang="en-US" sz="1200" dirty="0">
+                <a:solidFill>
+                  <a:srgbClr val="1C2833"/>
+                </a:solidFill>
+                <a:latin typeface="Arial" pitchFamily="34" charset="0"/>
+                <a:ea typeface="Arial" pitchFamily="34" charset="-122"/>
+                <a:cs typeface="Arial" pitchFamily="34" charset="-120"/>
+              </a:rPr>
+              <a:t>Printed formative quiz (5 questions, see </a:t>
+            </a:r>
+            <a:pPr algn="l" indent="0" marL="0">
+              <a:lnSpc>
+                <a:spcPts val="1620"/>
+              </a:lnSpc>
+              <a:spcAft>
+                <a:spcPts val="300"/>
+              </a:spcAft>
+              <a:buNone/>
+            </a:pPr>
+            <a:r>
+              <a:rPr lang="en-US" sz="1200" dirty="0">
+                <a:solidFill>
+                  <a:srgbClr val="1C2833"/>
+                </a:solidFill>
+                <a:latin typeface="Arial" pitchFamily="34" charset="0"/>
+                <a:ea typeface="Arial" pitchFamily="34" charset="-122"/>
+                <a:cs typeface="Arial" pitchFamily="34" charset="-120"/>
+              </a:rPr>
+              <a:t>quizzes/formative.md</a:t>
+            </a:r>
+            <a:pPr algn="l" indent="0" marL="0">
+              <a:lnSpc>
+                <a:spcPts val="1620"/>
+              </a:lnSpc>
+              <a:spcAft>
+                <a:spcPts val="300"/>
+              </a:spcAft>
+              <a:buNone/>
+            </a:pPr>
+            <a:r>
+              <a:rPr lang="en-US" sz="1200" dirty="0">
+                <a:solidFill>
+                  <a:srgbClr val="1C2833"/>
+                </a:solidFill>
+                <a:latin typeface="Arial" pitchFamily="34" charset="0"/>
+                <a:ea typeface="Arial" pitchFamily="34" charset="-122"/>
+                <a:cs typeface="Arial" pitchFamily="34" charset="-120"/>
+              </a:rPr>
+              <a:t> Part B) — one per student.</a:t>
+            </a:r>
+            <a:endParaRPr lang="en-US" sz="1200" dirty="0"/>
+          </a:p>
+          <a:p>
+            <a:pPr algn="l" marL="342900" indent="-342900">
+              <a:lnSpc>
+                <a:spcPts val="1620"/>
+              </a:lnSpc>
+              <a:spcAft>
+                <a:spcPts val="300"/>
+              </a:spcAft>
+              <a:buSzPct val="100000"/>
+              <a:buChar char="•"/>
+            </a:pPr>
+            <a:r>
+              <a:rPr lang="en-US" sz="1200" dirty="0">
+                <a:solidFill>
+                  <a:srgbClr val="1C2833"/>
+                </a:solidFill>
+                <a:latin typeface="Arial" pitchFamily="34" charset="0"/>
+                <a:ea typeface="Arial" pitchFamily="34" charset="-122"/>
+                <a:cs typeface="Arial" pitchFamily="34" charset="-120"/>
+              </a:rPr>
+              <a:t>Sample project briefs (see </a:t>
+            </a:r>
+            <a:pPr algn="l" indent="0" marL="0">
+              <a:lnSpc>
+                <a:spcPts val="1620"/>
+              </a:lnSpc>
+              <a:spcAft>
+                <a:spcPts val="300"/>
+              </a:spcAft>
+              <a:buNone/>
+            </a:pPr>
+            <a:r>
+              <a:rPr lang="en-US" sz="1200" dirty="0">
+                <a:solidFill>
+                  <a:srgbClr val="1C2833"/>
+                </a:solidFill>
+                <a:latin typeface="Arial" pitchFamily="34" charset="0"/>
+                <a:ea typeface="Arial" pitchFamily="34" charset="-122"/>
+                <a:cs typeface="Arial" pitchFamily="34" charset="-120"/>
+              </a:rPr>
+              <a:t>assessments/project-brief.md</a:t>
+            </a:r>
+            <a:pPr algn="l" indent="0" marL="0">
+              <a:lnSpc>
+                <a:spcPts val="1620"/>
+              </a:lnSpc>
+              <a:spcAft>
+                <a:spcPts val="300"/>
+              </a:spcAft>
+              <a:buNone/>
+            </a:pPr>
+            <a:r>
+              <a:rPr lang="en-US" sz="1200" dirty="0">
+                <a:solidFill>
+                  <a:srgbClr val="1C2833"/>
+                </a:solidFill>
+                <a:latin typeface="Arial" pitchFamily="34" charset="0"/>
+                <a:ea typeface="Arial" pitchFamily="34" charset="-122"/>
+                <a:cs typeface="Arial" pitchFamily="34" charset="-120"/>
+              </a:rPr>
+              <a:t>) — one per pair.</a:t>
+            </a:r>
+            <a:endParaRPr lang="en-US" sz="1200" dirty="0"/>
+          </a:p>
+          <a:p>
+            <a:pPr algn="l" marL="342900" indent="-342900">
+              <a:lnSpc>
+                <a:spcPts val="1620"/>
+              </a:lnSpc>
+              <a:spcAft>
+                <a:spcPts val="300"/>
+              </a:spcAft>
+              <a:buSzPct val="100000"/>
+              <a:buChar char="•"/>
+            </a:pPr>
+            <a:r>
+              <a:rPr lang="en-US" sz="1200" dirty="0">
+                <a:solidFill>
+                  <a:srgbClr val="1C2833"/>
+                </a:solidFill>
+                <a:latin typeface="Arial" pitchFamily="34" charset="0"/>
+                <a:ea typeface="Arial" pitchFamily="34" charset="-122"/>
+                <a:cs typeface="Arial" pitchFamily="34" charset="-120"/>
+              </a:rPr>
+              <a:t>Sticky notes (3 per student).</a:t>
+            </a:r>
+            <a:endParaRPr lang="en-US" sz="1200" dirty="0"/>
+          </a:p>
+        </p:txBody>
+      </p:sp>
+      <p:sp>
+        <p:nvSpPr>
+          <p:cNvPr id="5" name="Text 3"/>
           <p:cNvSpPr/>
           <p:nvPr/>
         </p:nvSpPr>
@@ -3516,7 +3839,7 @@
                 <a:ea typeface="Georgia" pitchFamily="34" charset="-122"/>
                 <a:cs typeface="Georgia" pitchFamily="34" charset="-120"/>
               </a:rPr>
-              <a:t>Warm-up (5 min)</a:t>
+              <a:t>Lesson flow</a:t>
             </a:r>
             <a:endParaRPr lang="en-US" sz="1800" dirty="0"/>
           </a:p>
@@ -3525,100 +3848,6 @@
       <p:sp>
         <p:nvSpPr>
           <p:cNvPr id="4" name="Text 2"/>
-          <p:cNvSpPr/>
-          <p:nvPr/>
-        </p:nvSpPr>
-        <p:spPr>
-          <a:xfrm>
-            <a:off x="406301" y="870942"/>
-            <a:ext cx="8498026" cy="426541"/>
-          </a:xfrm>
-          <a:prstGeom prst="rect">
-            <a:avLst/>
-          </a:prstGeom>
-          <a:noFill/>
-          <a:ln/>
-        </p:spPr>
-        <p:txBody>
-          <a:bodyPr wrap="square" lIns="0" tIns="0" rIns="0" bIns="0" rtlCol="0" anchor="t"/>
-          <a:lstStyle/>
-          <a:p>
-            <a:pPr algn="l" indent="0" marL="0">
-              <a:lnSpc>
-                <a:spcPts val="1680"/>
-              </a:lnSpc>
-              <a:spcBef>
-                <a:spcPts val="300"/>
-              </a:spcBef>
-              <a:spcAft>
-                <a:spcPts val="300"/>
-              </a:spcAft>
-              <a:buNone/>
-            </a:pPr>
-            <a:r>
-              <a:rPr lang="en-US" sz="1200" dirty="0">
-                <a:solidFill>
-                  <a:srgbClr val="1C2833"/>
-                </a:solidFill>
-                <a:latin typeface="Arial" pitchFamily="34" charset="0"/>
-                <a:ea typeface="Arial" pitchFamily="34" charset="-122"/>
-                <a:cs typeface="Arial" pitchFamily="34" charset="-120"/>
-              </a:rPr>
-              <a:t>– Hand back yesterday's formative slip (the 5 quick questions from Day 3). Don't review answers — just hand them back. – Daily prompt: </a:t>
-            </a:r>
-            <a:pPr algn="l" indent="0" marL="0">
-              <a:lnSpc>
-                <a:spcPts val="1680"/>
-              </a:lnSpc>
-              <a:spcBef>
-                <a:spcPts val="300"/>
-              </a:spcBef>
-              <a:spcAft>
-                <a:spcPts val="300"/>
-              </a:spcAft>
-              <a:buNone/>
-            </a:pPr>
-            <a:r>
-              <a:rPr lang="en-US" sz="1200" i="1" dirty="0">
-                <a:solidFill>
-                  <a:srgbClr val="1C2833"/>
-                </a:solidFill>
-                <a:latin typeface="Arial" pitchFamily="34" charset="0"/>
-                <a:ea typeface="Arial" pitchFamily="34" charset="-122"/>
-                <a:cs typeface="Arial" pitchFamily="34" charset="-120"/>
-              </a:rPr>
-              <a:t>"Which element did you notice most over the weekend?"</a:t>
-            </a:r>
-            <a:pPr algn="l" indent="0" marL="0">
-              <a:lnSpc>
-                <a:spcPts val="1680"/>
-              </a:lnSpc>
-              <a:spcBef>
-                <a:spcPts val="300"/>
-              </a:spcBef>
-              <a:spcAft>
-                <a:spcPts val="300"/>
-              </a:spcAft>
-              <a:buNone/>
-            </a:pPr>
-            <a:r>
-              <a:rPr lang="en-US" sz="1200" dirty="0">
-                <a:solidFill>
-                  <a:srgbClr val="1C2833"/>
-                </a:solidFill>
-                <a:latin typeface="Arial" pitchFamily="34" charset="0"/>
-                <a:ea typeface="Arial" pitchFamily="34" charset="-122"/>
-                <a:cs typeface="Arial" pitchFamily="34" charset="-120"/>
-              </a:rPr>
-              <a:t> — 2 students.</a:t>
-            </a:r>
-            <a:endParaRPr lang="en-US" sz="1200" dirty="0"/>
-          </a:p>
-        </p:txBody>
-      </p:sp>
-      <p:sp>
-        <p:nvSpPr>
-          <p:cNvPr id="5" name="Text 3"/>
           <p:cNvSpPr/>
           <p:nvPr/>
         </p:nvSpPr>
@@ -3768,7 +3997,7 @@
                 <a:ea typeface="Georgia" pitchFamily="34" charset="-122"/>
                 <a:cs typeface="Georgia" pitchFamily="34" charset="-120"/>
               </a:rPr>
-              <a:t>Core (20 min) — Formative quiz + class review</a:t>
+              <a:t>Warm-up (5 min)</a:t>
             </a:r>
             <a:endParaRPr lang="en-US" sz="1800" dirty="0"/>
           </a:p>
@@ -3783,7 +4012,7 @@
         <p:spPr>
           <a:xfrm>
             <a:off x="634901" y="883593"/>
-            <a:ext cx="8102798" cy="1161752"/>
+            <a:ext cx="8102798" cy="525661"/>
           </a:xfrm>
           <a:prstGeom prst="rect">
             <a:avLst/>
@@ -3806,26 +4035,6 @@
               <a:buChar char="•"/>
             </a:pPr>
             <a:r>
-              <a:rPr lang="en-US" sz="1200" b="1" dirty="0">
-                <a:solidFill>
-                  <a:srgbClr val="1C2833"/>
-                </a:solidFill>
-                <a:latin typeface="Arial" pitchFamily="34" charset="0"/>
-                <a:ea typeface="Arial" pitchFamily="34" charset="-122"/>
-                <a:cs typeface="Arial" pitchFamily="34" charset="-120"/>
-              </a:rPr>
-              <a:t>Formative quiz (10 min)</a:t>
-            </a:r>
-            <a:pPr algn="l" indent="0" marL="0">
-              <a:lnSpc>
-                <a:spcPts val="1620"/>
-              </a:lnSpc>
-              <a:spcAft>
-                <a:spcPts val="300"/>
-              </a:spcAft>
-              <a:buNone/>
-            </a:pPr>
-            <a:r>
               <a:rPr lang="en-US" sz="1200" dirty="0">
                 <a:solidFill>
                   <a:srgbClr val="1C2833"/>
@@ -3834,87 +4043,7 @@
                 <a:ea typeface="Arial" pitchFamily="34" charset="-122"/>
                 <a:cs typeface="Arial" pitchFamily="34" charset="-120"/>
               </a:rPr>
-              <a:t> — </a:t>
-            </a:r>
-            <a:pPr algn="l" indent="0" marL="0">
-              <a:lnSpc>
-                <a:spcPts val="1620"/>
-              </a:lnSpc>
-              <a:spcAft>
-                <a:spcPts val="300"/>
-              </a:spcAft>
-              <a:buNone/>
-            </a:pPr>
-            <a:r>
-              <a:rPr lang="en-US" sz="1200" dirty="0">
-                <a:solidFill>
-                  <a:srgbClr val="1C2833"/>
-                </a:solidFill>
-                <a:latin typeface="Arial" pitchFamily="34" charset="0"/>
-                <a:ea typeface="Arial" pitchFamily="34" charset="-122"/>
-                <a:cs typeface="Arial" pitchFamily="34" charset="-120"/>
-              </a:rPr>
-              <a:t>quizzes/formative.md</a:t>
-            </a:r>
-            <a:pPr algn="l" indent="0" marL="0">
-              <a:lnSpc>
-                <a:spcPts val="1620"/>
-              </a:lnSpc>
-              <a:spcAft>
-                <a:spcPts val="300"/>
-              </a:spcAft>
-              <a:buNone/>
-            </a:pPr>
-            <a:r>
-              <a:rPr lang="en-US" sz="1200" dirty="0">
-                <a:solidFill>
-                  <a:srgbClr val="1C2833"/>
-                </a:solidFill>
-                <a:latin typeface="Arial" pitchFamily="34" charset="0"/>
-                <a:ea typeface="Arial" pitchFamily="34" charset="-122"/>
-                <a:cs typeface="Arial" pitchFamily="34" charset="-120"/>
-              </a:rPr>
-              <a:t> Part B. Closed notebook. 5 questions: MCQ on the order of emergence, fill-in on the quality-table, one short-answer "name an object dominated by </a:t>
-            </a:r>
-            <a:pPr algn="l" indent="0" marL="0">
-              <a:lnSpc>
-                <a:spcPts val="1620"/>
-              </a:lnSpc>
-              <a:spcAft>
-                <a:spcPts val="300"/>
-              </a:spcAft>
-              <a:buNone/>
-            </a:pPr>
-            <a:r>
-              <a:rPr lang="en-US" sz="1200" i="1" dirty="0">
-                <a:solidFill>
-                  <a:srgbClr val="1C2833"/>
-                </a:solidFill>
-                <a:latin typeface="Arial" pitchFamily="34" charset="0"/>
-                <a:ea typeface="Arial" pitchFamily="34" charset="-122"/>
-                <a:cs typeface="Arial" pitchFamily="34" charset="-120"/>
-              </a:rPr>
-              <a:t>ākāśa</a:t>
-            </a:r>
-            <a:pPr algn="l" indent="0" marL="0">
-              <a:lnSpc>
-                <a:spcPts val="1620"/>
-              </a:lnSpc>
-              <a:spcAft>
-                <a:spcPts val="300"/>
-              </a:spcAft>
-              <a:buNone/>
-            </a:pPr>
-            <a:r>
-              <a:rPr lang="en-US" sz="1200" dirty="0">
-                <a:solidFill>
-                  <a:srgbClr val="1C2833"/>
-                </a:solidFill>
-                <a:latin typeface="Arial" pitchFamily="34" charset="0"/>
-                <a:ea typeface="Arial" pitchFamily="34" charset="-122"/>
-                <a:cs typeface="Arial" pitchFamily="34" charset="-120"/>
-              </a:rPr>
-              <a:t>."</a:t>
+              <a:t>Hand back yesterday's formative slip (the 5 quick questions from Day 3). Don't review answers — just hand them back.</a:t>
             </a:r>
             <a:endParaRPr lang="en-US" sz="1200" dirty="0"/>
           </a:p>
@@ -3930,15 +4059,15 @@
               <a:buChar char="•"/>
             </a:pPr>
             <a:r>
-              <a:rPr lang="en-US" sz="1200" b="1" dirty="0">
-                <a:solidFill>
-                  <a:srgbClr val="1C2833"/>
-                </a:solidFill>
-                <a:latin typeface="Arial" pitchFamily="34" charset="0"/>
-                <a:ea typeface="Arial" pitchFamily="34" charset="-122"/>
-                <a:cs typeface="Arial" pitchFamily="34" charset="-120"/>
-              </a:rPr>
-              <a:t>Review together (10 min)</a:t>
+              <a:rPr lang="en-US" sz="1200" dirty="0">
+                <a:solidFill>
+                  <a:srgbClr val="1C2833"/>
+                </a:solidFill>
+                <a:latin typeface="Arial" pitchFamily="34" charset="0"/>
+                <a:ea typeface="Arial" pitchFamily="34" charset="-122"/>
+                <a:cs typeface="Arial" pitchFamily="34" charset="-120"/>
+              </a:rPr>
+              <a:t>Daily prompt: </a:t>
             </a:r>
             <a:pPr algn="l" indent="0" marL="0">
               <a:lnSpc>
@@ -3950,6 +4079,26 @@
               <a:buNone/>
             </a:pPr>
             <a:r>
+              <a:rPr lang="en-US" sz="1200" i="1" dirty="0">
+                <a:solidFill>
+                  <a:srgbClr val="1C2833"/>
+                </a:solidFill>
+                <a:latin typeface="Arial" pitchFamily="34" charset="0"/>
+                <a:ea typeface="Arial" pitchFamily="34" charset="-122"/>
+                <a:cs typeface="Arial" pitchFamily="34" charset="-120"/>
+              </a:rPr>
+              <a:t>"Which element did you notice most over the weekend?"</a:t>
+            </a:r>
+            <a:pPr algn="l" indent="0" marL="0">
+              <a:lnSpc>
+                <a:spcPts val="1620"/>
+              </a:lnSpc>
+              <a:spcAft>
+                <a:spcPts val="300"/>
+              </a:spcAft>
+              <a:buNone/>
+            </a:pPr>
+            <a:r>
               <a:rPr lang="en-US" sz="1200" dirty="0">
                 <a:solidFill>
                   <a:srgbClr val="1C2833"/>
@@ -3958,47 +4107,7 @@
                 <a:ea typeface="Arial" pitchFamily="34" charset="-122"/>
                 <a:cs typeface="Arial" pitchFamily="34" charset="-120"/>
               </a:rPr>
-              <a:t> — go through each question. Don't grade now; grade overnight. The goal here is exposure to common errors. Ask: </a:t>
-            </a:r>
-            <a:pPr algn="l" indent="0" marL="0">
-              <a:lnSpc>
-                <a:spcPts val="1620"/>
-              </a:lnSpc>
-              <a:spcAft>
-                <a:spcPts val="300"/>
-              </a:spcAft>
-              <a:buNone/>
-            </a:pPr>
-            <a:r>
-              <a:rPr lang="en-US" sz="1200" i="1" dirty="0">
-                <a:solidFill>
-                  <a:srgbClr val="1C2833"/>
-                </a:solidFill>
-                <a:latin typeface="Arial" pitchFamily="34" charset="0"/>
-                <a:ea typeface="Arial" pitchFamily="34" charset="-122"/>
-                <a:cs typeface="Arial" pitchFamily="34" charset="-120"/>
-              </a:rPr>
-              <a:t>"who would have answered (b)? Why?"</a:t>
-            </a:r>
-            <a:pPr algn="l" indent="0" marL="0">
-              <a:lnSpc>
-                <a:spcPts val="1620"/>
-              </a:lnSpc>
-              <a:spcAft>
-                <a:spcPts val="300"/>
-              </a:spcAft>
-              <a:buNone/>
-            </a:pPr>
-            <a:r>
-              <a:rPr lang="en-US" sz="1200" dirty="0">
-                <a:solidFill>
-                  <a:srgbClr val="1C2833"/>
-                </a:solidFill>
-                <a:latin typeface="Arial" pitchFamily="34" charset="0"/>
-                <a:ea typeface="Arial" pitchFamily="34" charset="-122"/>
-                <a:cs typeface="Arial" pitchFamily="34" charset="-120"/>
-              </a:rPr>
-              <a:t> Invite the wrong reasoning, surface the misconception, correct it.</a:t>
+              <a:t> — 2 students.</a:t>
             </a:r>
             <a:endParaRPr lang="en-US" sz="1200" dirty="0"/>
           </a:p>
@@ -4156,7 +4265,7 @@
                 <a:ea typeface="Georgia" pitchFamily="34" charset="-122"/>
                 <a:cs typeface="Georgia" pitchFamily="34" charset="-120"/>
               </a:rPr>
-              <a:t>Activity (15 min) — Project commitment</a:t>
+              <a:t>Core (20 min) — Formative quiz + class review</a:t>
             </a:r>
             <a:endParaRPr lang="en-US" sz="1800" dirty="0"/>
           </a:p>
@@ -4170,8 +4279,8 @@
         </p:nvSpPr>
         <p:spPr>
           <a:xfrm>
-            <a:off x="406301" y="870942"/>
-            <a:ext cx="8498026" cy="1066354"/>
+            <a:off x="634901" y="883593"/>
+            <a:ext cx="8102798" cy="1161752"/>
           </a:xfrm>
           <a:prstGeom prst="rect">
             <a:avLst/>
@@ -4183,13 +4292,31 @@
           <a:bodyPr wrap="square" lIns="0" tIns="0" rIns="0" bIns="0" rtlCol="0" anchor="t"/>
           <a:lstStyle/>
           <a:p>
-            <a:pPr algn="l" indent="0" marL="0">
-              <a:lnSpc>
-                <a:spcPts val="1680"/>
-              </a:lnSpc>
-              <a:spcBef>
-                <a:spcPts val="300"/>
-              </a:spcBef>
+            <a:pPr algn="l" marL="342900" indent="-342900">
+              <a:lnSpc>
+                <a:spcPts val="1620"/>
+              </a:lnSpc>
+              <a:spcAft>
+                <a:spcPts val="300"/>
+              </a:spcAft>
+              <a:buSzPct val="100000"/>
+              <a:buChar char="•"/>
+            </a:pPr>
+            <a:r>
+              <a:rPr lang="en-US" sz="1200" b="1" dirty="0">
+                <a:solidFill>
+                  <a:srgbClr val="1C2833"/>
+                </a:solidFill>
+                <a:latin typeface="Arial" pitchFamily="34" charset="0"/>
+                <a:ea typeface="Arial" pitchFamily="34" charset="-122"/>
+                <a:cs typeface="Arial" pitchFamily="34" charset="-120"/>
+              </a:rPr>
+              <a:t>Formative quiz (10 min)</a:t>
+            </a:r>
+            <a:pPr algn="l" indent="0" marL="0">
+              <a:lnSpc>
+                <a:spcPts val="1620"/>
+              </a:lnSpc>
               <a:spcAft>
                 <a:spcPts val="300"/>
               </a:spcAft>
@@ -4204,19 +4331,100 @@
                 <a:ea typeface="Arial" pitchFamily="34" charset="-122"/>
                 <a:cs typeface="Arial" pitchFamily="34" charset="-120"/>
               </a:rPr>
-              <a:t>– Hand out the project brief. Read aloud the </a:t>
-            </a:r>
-            <a:pPr algn="l" indent="0" marL="0">
-              <a:lnSpc>
-                <a:spcPts val="1680"/>
-              </a:lnSpc>
-              <a:spcBef>
-                <a:spcPts val="300"/>
-              </a:spcBef>
-              <a:spcAft>
-                <a:spcPts val="300"/>
-              </a:spcAft>
-              <a:buNone/>
+              <a:t> — </a:t>
+            </a:r>
+            <a:pPr algn="l" indent="0" marL="0">
+              <a:lnSpc>
+                <a:spcPts val="1620"/>
+              </a:lnSpc>
+              <a:spcAft>
+                <a:spcPts val="300"/>
+              </a:spcAft>
+              <a:buNone/>
+            </a:pPr>
+            <a:r>
+              <a:rPr lang="en-US" sz="1200" dirty="0">
+                <a:solidFill>
+                  <a:srgbClr val="1C2833"/>
+                </a:solidFill>
+                <a:latin typeface="Arial" pitchFamily="34" charset="0"/>
+                <a:ea typeface="Arial" pitchFamily="34" charset="-122"/>
+                <a:cs typeface="Arial" pitchFamily="34" charset="-120"/>
+              </a:rPr>
+              <a:t>quizzes/formative.md</a:t>
+            </a:r>
+            <a:pPr algn="l" indent="0" marL="0">
+              <a:lnSpc>
+                <a:spcPts val="1620"/>
+              </a:lnSpc>
+              <a:spcAft>
+                <a:spcPts val="300"/>
+              </a:spcAft>
+              <a:buNone/>
+            </a:pPr>
+            <a:r>
+              <a:rPr lang="en-US" sz="1200" dirty="0">
+                <a:solidFill>
+                  <a:srgbClr val="1C2833"/>
+                </a:solidFill>
+                <a:latin typeface="Arial" pitchFamily="34" charset="0"/>
+                <a:ea typeface="Arial" pitchFamily="34" charset="-122"/>
+                <a:cs typeface="Arial" pitchFamily="34" charset="-120"/>
+              </a:rPr>
+              <a:t> Part B. Closed notebook. 5 questions: MCQ on the order of emergence, fill-in on the quality-table, one short-answer "name an object dominated by </a:t>
+            </a:r>
+            <a:pPr algn="l" indent="0" marL="0">
+              <a:lnSpc>
+                <a:spcPts val="1620"/>
+              </a:lnSpc>
+              <a:spcAft>
+                <a:spcPts val="300"/>
+              </a:spcAft>
+              <a:buNone/>
+            </a:pPr>
+            <a:r>
+              <a:rPr lang="en-US" sz="1200" i="1" dirty="0">
+                <a:solidFill>
+                  <a:srgbClr val="1C2833"/>
+                </a:solidFill>
+                <a:latin typeface="Arial" pitchFamily="34" charset="0"/>
+                <a:ea typeface="Arial" pitchFamily="34" charset="-122"/>
+                <a:cs typeface="Arial" pitchFamily="34" charset="-120"/>
+              </a:rPr>
+              <a:t>ākāśa</a:t>
+            </a:r>
+            <a:pPr algn="l" indent="0" marL="0">
+              <a:lnSpc>
+                <a:spcPts val="1620"/>
+              </a:lnSpc>
+              <a:spcAft>
+                <a:spcPts val="300"/>
+              </a:spcAft>
+              <a:buNone/>
+            </a:pPr>
+            <a:r>
+              <a:rPr lang="en-US" sz="1200" dirty="0">
+                <a:solidFill>
+                  <a:srgbClr val="1C2833"/>
+                </a:solidFill>
+                <a:latin typeface="Arial" pitchFamily="34" charset="0"/>
+                <a:ea typeface="Arial" pitchFamily="34" charset="-122"/>
+                <a:cs typeface="Arial" pitchFamily="34" charset="-120"/>
+              </a:rPr>
+              <a:t>."</a:t>
+            </a:r>
+            <a:endParaRPr lang="en-US" sz="1200" dirty="0"/>
+          </a:p>
+          <a:p>
+            <a:pPr algn="l" marL="342900" indent="-342900">
+              <a:lnSpc>
+                <a:spcPts val="1620"/>
+              </a:lnSpc>
+              <a:spcAft>
+                <a:spcPts val="300"/>
+              </a:spcAft>
+              <a:buSzPct val="100000"/>
+              <a:buChar char="•"/>
             </a:pPr>
             <a:r>
               <a:rPr lang="en-US" sz="1200" b="1" dirty="0">
@@ -4227,15 +4435,12 @@
                 <a:ea typeface="Arial" pitchFamily="34" charset="-122"/>
                 <a:cs typeface="Arial" pitchFamily="34" charset="-120"/>
               </a:rPr>
-              <a:t>one-paragraph project description</a:t>
-            </a:r>
-            <a:pPr algn="l" indent="0" marL="0">
-              <a:lnSpc>
-                <a:spcPts val="1680"/>
-              </a:lnSpc>
-              <a:spcBef>
-                <a:spcPts val="300"/>
-              </a:spcBef>
+              <a:t>Review together (10 min)</a:t>
+            </a:r>
+            <a:pPr algn="l" indent="0" marL="0">
+              <a:lnSpc>
+                <a:spcPts val="1620"/>
+              </a:lnSpc>
               <a:spcAft>
                 <a:spcPts val="300"/>
               </a:spcAft>
@@ -4250,38 +4455,32 @@
                 <a:ea typeface="Arial" pitchFamily="34" charset="-122"/>
                 <a:cs typeface="Arial" pitchFamily="34" charset="-120"/>
               </a:rPr>
-              <a:t> and the </a:t>
-            </a:r>
-            <a:pPr algn="l" indent="0" marL="0">
-              <a:lnSpc>
-                <a:spcPts val="1680"/>
-              </a:lnSpc>
-              <a:spcBef>
-                <a:spcPts val="300"/>
-              </a:spcBef>
-              <a:spcAft>
-                <a:spcPts val="300"/>
-              </a:spcAft>
-              <a:buNone/>
-            </a:pPr>
-            <a:r>
-              <a:rPr lang="en-US" sz="1200" b="1" dirty="0">
-                <a:solidFill>
-                  <a:srgbClr val="1C2833"/>
-                </a:solidFill>
-                <a:latin typeface="Arial" pitchFamily="34" charset="0"/>
-                <a:ea typeface="Arial" pitchFamily="34" charset="-122"/>
-                <a:cs typeface="Arial" pitchFamily="34" charset="-120"/>
-              </a:rPr>
-              <a:t>list of project format options</a:t>
-            </a:r>
-            <a:pPr algn="l" indent="0" marL="0">
-              <a:lnSpc>
-                <a:spcPts val="1680"/>
-              </a:lnSpc>
-              <a:spcBef>
-                <a:spcPts val="300"/>
-              </a:spcBef>
+              <a:t> — go through each question. Don't grade now; grade overnight. The goal here is exposure to common errors. Ask: </a:t>
+            </a:r>
+            <a:pPr algn="l" indent="0" marL="0">
+              <a:lnSpc>
+                <a:spcPts val="1620"/>
+              </a:lnSpc>
+              <a:spcAft>
+                <a:spcPts val="300"/>
+              </a:spcAft>
+              <a:buNone/>
+            </a:pPr>
+            <a:r>
+              <a:rPr lang="en-US" sz="1200" i="1" dirty="0">
+                <a:solidFill>
+                  <a:srgbClr val="1C2833"/>
+                </a:solidFill>
+                <a:latin typeface="Arial" pitchFamily="34" charset="0"/>
+                <a:ea typeface="Arial" pitchFamily="34" charset="-122"/>
+                <a:cs typeface="Arial" pitchFamily="34" charset="-120"/>
+              </a:rPr>
+              <a:t>"who would have answered (b)? Why?"</a:t>
+            </a:r>
+            <a:pPr algn="l" indent="0" marL="0">
+              <a:lnSpc>
+                <a:spcPts val="1620"/>
+              </a:lnSpc>
               <a:spcAft>
                 <a:spcPts val="300"/>
               </a:spcAft>
@@ -4296,7 +4495,7 @@
                 <a:ea typeface="Arial" pitchFamily="34" charset="-122"/>
                 <a:cs typeface="Arial" pitchFamily="34" charset="-120"/>
               </a:rPr>
-              <a:t> (poster, demo, short story, 90-second video, infographic, songbook). – Pairs / individuals choose: – Element they'll focus on – Format – One-sentence "what we'll show" – Each pair writes their three choices on a sticky note and posts on the board under the element label. – Teacher does a 30-second sanity check on each — if a pair has chosen something impractical for the time available, redirect now.</a:t>
+              <a:t> Invite the wrong reasoning, surface the misconception, correct it.</a:t>
             </a:r>
             <a:endParaRPr lang="en-US" sz="1200" dirty="0"/>
           </a:p>
@@ -4454,7 +4653,7 @@
                 <a:ea typeface="Georgia" pitchFamily="34" charset="-122"/>
                 <a:cs typeface="Georgia" pitchFamily="34" charset="-120"/>
               </a:rPr>
-              <a:t>Wrap-up (5 min)</a:t>
+              <a:t>Activity (15 min) — Project commitment</a:t>
             </a:r>
             <a:endParaRPr lang="en-US" sz="1800" dirty="0"/>
           </a:p>
@@ -4468,8 +4667,8 @@
         </p:nvSpPr>
         <p:spPr>
           <a:xfrm>
-            <a:off x="406301" y="870942"/>
-            <a:ext cx="8498026" cy="639812"/>
+            <a:off x="634901" y="883593"/>
+            <a:ext cx="8102798" cy="2155924"/>
           </a:xfrm>
           <a:prstGeom prst="rect">
             <a:avLst/>
@@ -4481,17 +4680,15 @@
           <a:bodyPr wrap="square" lIns="0" tIns="0" rIns="0" bIns="0" rtlCol="0" anchor="t"/>
           <a:lstStyle/>
           <a:p>
-            <a:pPr algn="l" indent="0" marL="0">
-              <a:lnSpc>
-                <a:spcPts val="1680"/>
-              </a:lnSpc>
-              <a:spcBef>
-                <a:spcPts val="300"/>
-              </a:spcBef>
-              <a:spcAft>
-                <a:spcPts val="300"/>
-              </a:spcAft>
-              <a:buNone/>
+            <a:pPr algn="l" marL="342900" indent="-342900">
+              <a:lnSpc>
+                <a:spcPts val="1620"/>
+              </a:lnSpc>
+              <a:spcAft>
+                <a:spcPts val="300"/>
+              </a:spcAft>
+              <a:buSzPct val="100000"/>
+              <a:buChar char="•"/>
             </a:pPr>
             <a:r>
               <a:rPr lang="en-US" sz="1200" dirty="0">
@@ -4502,38 +4699,32 @@
                 <a:ea typeface="Arial" pitchFamily="34" charset="-122"/>
                 <a:cs typeface="Arial" pitchFamily="34" charset="-120"/>
               </a:rPr>
-              <a:t>– The board is a snapshot of the class's project distribution. Note out loud: </a:t>
-            </a:r>
-            <a:pPr algn="l" indent="0" marL="0">
-              <a:lnSpc>
-                <a:spcPts val="1680"/>
-              </a:lnSpc>
-              <a:spcBef>
-                <a:spcPts val="300"/>
-              </a:spcBef>
-              <a:spcAft>
-                <a:spcPts val="300"/>
-              </a:spcAft>
-              <a:buNone/>
-            </a:pPr>
-            <a:r>
-              <a:rPr lang="en-US" sz="1200" i="1" dirty="0">
-                <a:solidFill>
-                  <a:srgbClr val="1C2833"/>
-                </a:solidFill>
-                <a:latin typeface="Arial" pitchFamily="34" charset="0"/>
-                <a:ea typeface="Arial" pitchFamily="34" charset="-122"/>
-                <a:cs typeface="Arial" pitchFamily="34" charset="-120"/>
-              </a:rPr>
-              <a:t>"We have 4 groups on water, only 1 on space — interesting. Group on space, you'll have a unique presentation. Water groups, find a way to make yours distinct."</a:t>
-            </a:r>
-            <a:pPr algn="l" indent="0" marL="0">
-              <a:lnSpc>
-                <a:spcPts val="1680"/>
-              </a:lnSpc>
-              <a:spcBef>
-                <a:spcPts val="300"/>
-              </a:spcBef>
+              <a:t>Hand out the project brief. Read aloud the </a:t>
+            </a:r>
+            <a:pPr algn="l" indent="0" marL="0">
+              <a:lnSpc>
+                <a:spcPts val="1620"/>
+              </a:lnSpc>
+              <a:spcAft>
+                <a:spcPts val="300"/>
+              </a:spcAft>
+              <a:buNone/>
+            </a:pPr>
+            <a:r>
+              <a:rPr lang="en-US" sz="1200" b="1" dirty="0">
+                <a:solidFill>
+                  <a:srgbClr val="1C2833"/>
+                </a:solidFill>
+                <a:latin typeface="Arial" pitchFamily="34" charset="0"/>
+                <a:ea typeface="Arial" pitchFamily="34" charset="-122"/>
+                <a:cs typeface="Arial" pitchFamily="34" charset="-120"/>
+              </a:rPr>
+              <a:t>one-paragraph project description</a:t>
+            </a:r>
+            <a:pPr algn="l" indent="0" marL="0">
+              <a:lnSpc>
+                <a:spcPts val="1620"/>
+              </a:lnSpc>
               <a:spcAft>
                 <a:spcPts val="300"/>
               </a:spcAft>
@@ -4548,7 +4739,191 @@
                 <a:ea typeface="Arial" pitchFamily="34" charset="-122"/>
                 <a:cs typeface="Arial" pitchFamily="34" charset="-120"/>
               </a:rPr>
-              <a:t> – Preview Day 6: "Tomorrow we leave Sanskrit for a day and look at the modern science framework — and ask which one is 'right.'"</a:t>
+              <a:t> and the </a:t>
+            </a:r>
+            <a:pPr algn="l" indent="0" marL="0">
+              <a:lnSpc>
+                <a:spcPts val="1620"/>
+              </a:lnSpc>
+              <a:spcAft>
+                <a:spcPts val="300"/>
+              </a:spcAft>
+              <a:buNone/>
+            </a:pPr>
+            <a:r>
+              <a:rPr lang="en-US" sz="1200" b="1" dirty="0">
+                <a:solidFill>
+                  <a:srgbClr val="1C2833"/>
+                </a:solidFill>
+                <a:latin typeface="Arial" pitchFamily="34" charset="0"/>
+                <a:ea typeface="Arial" pitchFamily="34" charset="-122"/>
+                <a:cs typeface="Arial" pitchFamily="34" charset="-120"/>
+              </a:rPr>
+              <a:t>list of project format options</a:t>
+            </a:r>
+            <a:pPr algn="l" indent="0" marL="0">
+              <a:lnSpc>
+                <a:spcPts val="1620"/>
+              </a:lnSpc>
+              <a:spcAft>
+                <a:spcPts val="300"/>
+              </a:spcAft>
+              <a:buNone/>
+            </a:pPr>
+            <a:r>
+              <a:rPr lang="en-US" sz="1200" dirty="0">
+                <a:solidFill>
+                  <a:srgbClr val="1C2833"/>
+                </a:solidFill>
+                <a:latin typeface="Arial" pitchFamily="34" charset="0"/>
+                <a:ea typeface="Arial" pitchFamily="34" charset="-122"/>
+                <a:cs typeface="Arial" pitchFamily="34" charset="-120"/>
+              </a:rPr>
+              <a:t> (poster, demo, short story, 90-second video, infographic, songbook).</a:t>
+            </a:r>
+            <a:endParaRPr lang="en-US" sz="1200" dirty="0"/>
+          </a:p>
+          <a:p>
+            <a:pPr algn="l" marL="342900" indent="-342900">
+              <a:lnSpc>
+                <a:spcPts val="1620"/>
+              </a:lnSpc>
+              <a:spcAft>
+                <a:spcPts val="300"/>
+              </a:spcAft>
+              <a:buSzPct val="100000"/>
+              <a:buChar char="•"/>
+            </a:pPr>
+            <a:r>
+              <a:rPr lang="en-US" sz="1200" dirty="0">
+                <a:solidFill>
+                  <a:srgbClr val="1C2833"/>
+                </a:solidFill>
+                <a:latin typeface="Arial" pitchFamily="34" charset="0"/>
+                <a:ea typeface="Arial" pitchFamily="34" charset="-122"/>
+                <a:cs typeface="Arial" pitchFamily="34" charset="-120"/>
+              </a:rPr>
+              <a:t>Pairs / individuals choose:</a:t>
+            </a:r>
+            <a:endParaRPr lang="en-US" sz="1200" dirty="0"/>
+          </a:p>
+          <a:p>
+            <a:pPr algn="l" marL="342900" indent="-342900">
+              <a:lnSpc>
+                <a:spcPts val="1620"/>
+              </a:lnSpc>
+              <a:spcAft>
+                <a:spcPts val="300"/>
+              </a:spcAft>
+              <a:buSzPct val="100000"/>
+              <a:buChar char="•"/>
+            </a:pPr>
+            <a:r>
+              <a:rPr lang="en-US" sz="1200" dirty="0">
+                <a:solidFill>
+                  <a:srgbClr val="1C2833"/>
+                </a:solidFill>
+                <a:latin typeface="Arial" pitchFamily="34" charset="0"/>
+                <a:ea typeface="Arial" pitchFamily="34" charset="-122"/>
+                <a:cs typeface="Arial" pitchFamily="34" charset="-120"/>
+              </a:rPr>
+              <a:t>Element they'll focus on</a:t>
+            </a:r>
+            <a:endParaRPr lang="en-US" sz="1200" dirty="0"/>
+          </a:p>
+          <a:p>
+            <a:pPr algn="l" marL="342900" indent="-342900">
+              <a:lnSpc>
+                <a:spcPts val="1620"/>
+              </a:lnSpc>
+              <a:spcAft>
+                <a:spcPts val="300"/>
+              </a:spcAft>
+              <a:buSzPct val="100000"/>
+              <a:buChar char="•"/>
+            </a:pPr>
+            <a:r>
+              <a:rPr lang="en-US" sz="1200" dirty="0">
+                <a:solidFill>
+                  <a:srgbClr val="1C2833"/>
+                </a:solidFill>
+                <a:latin typeface="Arial" pitchFamily="34" charset="0"/>
+                <a:ea typeface="Arial" pitchFamily="34" charset="-122"/>
+                <a:cs typeface="Arial" pitchFamily="34" charset="-120"/>
+              </a:rPr>
+              <a:t>Format</a:t>
+            </a:r>
+            <a:endParaRPr lang="en-US" sz="1200" dirty="0"/>
+          </a:p>
+          <a:p>
+            <a:pPr algn="l" marL="342900" indent="-342900">
+              <a:lnSpc>
+                <a:spcPts val="1620"/>
+              </a:lnSpc>
+              <a:spcAft>
+                <a:spcPts val="300"/>
+              </a:spcAft>
+              <a:buSzPct val="100000"/>
+              <a:buChar char="•"/>
+            </a:pPr>
+            <a:r>
+              <a:rPr lang="en-US" sz="1200" dirty="0">
+                <a:solidFill>
+                  <a:srgbClr val="1C2833"/>
+                </a:solidFill>
+                <a:latin typeface="Arial" pitchFamily="34" charset="0"/>
+                <a:ea typeface="Arial" pitchFamily="34" charset="-122"/>
+                <a:cs typeface="Arial" pitchFamily="34" charset="-120"/>
+              </a:rPr>
+              <a:t>One-sentence "what we'll show"</a:t>
+            </a:r>
+            <a:endParaRPr lang="en-US" sz="1200" dirty="0"/>
+          </a:p>
+          <a:p>
+            <a:pPr algn="l" marL="342900" indent="-342900">
+              <a:lnSpc>
+                <a:spcPts val="1620"/>
+              </a:lnSpc>
+              <a:spcAft>
+                <a:spcPts val="300"/>
+              </a:spcAft>
+              <a:buSzPct val="100000"/>
+              <a:buChar char="•"/>
+            </a:pPr>
+            <a:r>
+              <a:rPr lang="en-US" sz="1200" dirty="0">
+                <a:solidFill>
+                  <a:srgbClr val="1C2833"/>
+                </a:solidFill>
+                <a:latin typeface="Arial" pitchFamily="34" charset="0"/>
+                <a:ea typeface="Arial" pitchFamily="34" charset="-122"/>
+                <a:cs typeface="Arial" pitchFamily="34" charset="-120"/>
+              </a:rPr>
+              <a:t>Each pair writes their three choices on a sticky note and posts on the board under the element label.</a:t>
+            </a:r>
+            <a:endParaRPr lang="en-US" sz="1200" dirty="0"/>
+          </a:p>
+          <a:p>
+            <a:pPr algn="l" marL="342900" indent="-342900">
+              <a:lnSpc>
+                <a:spcPts val="1620"/>
+              </a:lnSpc>
+              <a:spcAft>
+                <a:spcPts val="300"/>
+              </a:spcAft>
+              <a:buSzPct val="100000"/>
+              <a:buChar char="•"/>
+            </a:pPr>
+            <a:r>
+              <a:rPr lang="en-US" sz="1200" dirty="0">
+                <a:solidFill>
+                  <a:srgbClr val="1C2833"/>
+                </a:solidFill>
+                <a:latin typeface="Arial" pitchFamily="34" charset="0"/>
+                <a:ea typeface="Arial" pitchFamily="34" charset="-122"/>
+                <a:cs typeface="Arial" pitchFamily="34" charset="-120"/>
+              </a:rPr>
+              <a:t>Teacher does a 30-second sanity check on each — if a pair has chosen something impractical for the time available, redirect now.</a:t>
             </a:r>
             <a:endParaRPr lang="en-US" sz="1200" dirty="0"/>
           </a:p>
@@ -4706,7 +5081,7 @@
                 <a:ea typeface="Georgia" pitchFamily="34" charset="-122"/>
                 <a:cs typeface="Georgia" pitchFamily="34" charset="-120"/>
               </a:rPr>
-              <a:t>Student-facing content</a:t>
+              <a:t>Wrap-up (5 min)</a:t>
             </a:r>
             <a:endParaRPr lang="en-US" sz="1800" dirty="0"/>
           </a:p>
@@ -4720,61 +5095,8 @@
         </p:nvSpPr>
         <p:spPr>
           <a:xfrm>
-            <a:off x="406301" y="883593"/>
-            <a:ext cx="8331398" cy="1881187"/>
-          </a:xfrm>
-          <a:prstGeom prst="rect">
-            <a:avLst/>
-          </a:prstGeom>
-          <a:solidFill>
-            <a:srgbClr val="F4F8F9"/>
-          </a:solidFill>
-          <a:ln/>
-        </p:spPr>
-        <p:txBody>
-          <a:bodyPr wrap="square" rtlCol="0" anchor="ctr"/>
-          <a:lstStyle/>
-          <a:p>
-            <a:pPr indent="0" marL="0">
-              <a:buNone/>
-            </a:pPr>
-            <a:endParaRPr lang="en-US" dirty="0"/>
-          </a:p>
-        </p:txBody>
-      </p:sp>
-      <p:sp>
-        <p:nvSpPr>
-          <p:cNvPr id="5" name="Shape 3"/>
-          <p:cNvSpPr/>
-          <p:nvPr/>
-        </p:nvSpPr>
-        <p:spPr>
-          <a:xfrm>
-            <a:off x="434876" y="883593"/>
-            <a:ext cx="0" cy="1881187"/>
-          </a:xfrm>
-          <a:prstGeom prst="line">
-            <a:avLst/>
-          </a:prstGeom>
-          <a:noFill/>
-          <a:ln w="57150">
-            <a:solidFill>
-              <a:srgbClr val="FE4447"/>
-            </a:solidFill>
-            <a:prstDash val="solid"/>
-          </a:ln>
-        </p:spPr>
-      </p:sp>
-      <p:sp>
-        <p:nvSpPr>
-          <p:cNvPr id="6" name="Text 4"/>
-          <p:cNvSpPr/>
-          <p:nvPr/>
-        </p:nvSpPr>
-        <p:spPr>
-          <a:xfrm>
-            <a:off x="692051" y="1074093"/>
-            <a:ext cx="7973389" cy="230981"/>
+            <a:off x="634901" y="883593"/>
+            <a:ext cx="8102798" cy="937022"/>
           </a:xfrm>
           <a:prstGeom prst="rect">
             <a:avLst/>
@@ -4786,525 +5108,78 @@
           <a:bodyPr wrap="square" lIns="0" tIns="0" rIns="0" bIns="0" rtlCol="0" anchor="t"/>
           <a:lstStyle/>
           <a:p>
-            <a:pPr algn="l" indent="0" marL="0">
-              <a:lnSpc>
-                <a:spcPts val="1820"/>
-              </a:lnSpc>
-              <a:spcBef>
-                <a:spcPts val="300"/>
-              </a:spcBef>
-              <a:spcAft>
-                <a:spcPts val="300"/>
-              </a:spcAft>
-              <a:buNone/>
-            </a:pPr>
-            <a:r>
-              <a:rPr lang="en-US" sz="1300" b="1" i="1" dirty="0">
-                <a:solidFill>
-                  <a:srgbClr val="1C2833"/>
-                </a:solidFill>
-                <a:latin typeface="Georgia" pitchFamily="34" charset="0"/>
-                <a:ea typeface="Georgia" pitchFamily="34" charset="-122"/>
-                <a:cs typeface="Georgia" pitchFamily="34" charset="-120"/>
-              </a:rPr>
-              <a:t>Mid-module check</a:t>
-            </a:r>
-            <a:pPr algn="l" indent="0" marL="0">
-              <a:lnSpc>
-                <a:spcPts val="1820"/>
-              </a:lnSpc>
-              <a:spcBef>
-                <a:spcPts val="300"/>
-              </a:spcBef>
-              <a:spcAft>
-                <a:spcPts val="300"/>
-              </a:spcAft>
-              <a:buNone/>
-            </a:pPr>
-            <a:r>
-              <a:rPr lang="en-US" sz="1300" dirty="0">
-                <a:solidFill>
-                  <a:srgbClr val="1C2833"/>
-                </a:solidFill>
-                <a:latin typeface="Georgia" pitchFamily="34" charset="0"/>
-                <a:ea typeface="Georgia" pitchFamily="34" charset="-122"/>
-                <a:cs typeface="Georgia" pitchFamily="34" charset="-120"/>
-              </a:rPr>
-              <a:t> — you'll take a short quiz today and choose your project.</a:t>
-            </a:r>
-            <a:endParaRPr lang="en-US" sz="1300" dirty="0"/>
-          </a:p>
-        </p:txBody>
-      </p:sp>
-      <p:sp>
-        <p:nvSpPr>
-          <p:cNvPr id="7" name="Text 5"/>
-          <p:cNvSpPr/>
-          <p:nvPr/>
-        </p:nvSpPr>
-        <p:spPr>
-          <a:xfrm>
-            <a:off x="692051" y="1343174"/>
-            <a:ext cx="7973389" cy="230981"/>
-          </a:xfrm>
-          <a:prstGeom prst="rect">
-            <a:avLst/>
-          </a:prstGeom>
-          <a:noFill/>
-          <a:ln/>
-        </p:spPr>
-        <p:txBody>
-          <a:bodyPr wrap="square" lIns="0" tIns="0" rIns="0" bIns="0" rtlCol="0" anchor="t"/>
-          <a:lstStyle/>
-          <a:p>
-            <a:pPr algn="l" indent="0" marL="0">
-              <a:lnSpc>
-                <a:spcPts val="1820"/>
-              </a:lnSpc>
-              <a:spcBef>
-                <a:spcPts val="300"/>
-              </a:spcBef>
-              <a:spcAft>
-                <a:spcPts val="300"/>
-              </a:spcAft>
-              <a:buNone/>
-            </a:pPr>
-            <a:r>
-              <a:rPr lang="en-US" sz="1300" i="1" dirty="0">
-                <a:solidFill>
-                  <a:srgbClr val="1C2833"/>
-                </a:solidFill>
-                <a:latin typeface="Georgia" pitchFamily="34" charset="0"/>
-                <a:ea typeface="Georgia" pitchFamily="34" charset="-122"/>
-                <a:cs typeface="Georgia" pitchFamily="34" charset="-120"/>
-              </a:rPr>
-              <a:t>Project options for your final assignment (Days 8–10):</a:t>
-            </a:r>
-            <a:endParaRPr lang="en-US" sz="1300" dirty="0"/>
-          </a:p>
-        </p:txBody>
-      </p:sp>
-      <p:sp>
-        <p:nvSpPr>
-          <p:cNvPr id="8" name="Text 6"/>
-          <p:cNvSpPr/>
-          <p:nvPr/>
-        </p:nvSpPr>
-        <p:spPr>
-          <a:xfrm>
-            <a:off x="692051" y="1612255"/>
-            <a:ext cx="7973389" cy="692944"/>
-          </a:xfrm>
-          <a:prstGeom prst="rect">
-            <a:avLst/>
-          </a:prstGeom>
-          <a:noFill/>
-          <a:ln/>
-        </p:spPr>
-        <p:txBody>
-          <a:bodyPr wrap="square" lIns="0" tIns="0" rIns="0" bIns="0" rtlCol="0" anchor="t"/>
-          <a:lstStyle/>
-          <a:p>
-            <a:pPr algn="l" indent="0" marL="0">
-              <a:lnSpc>
-                <a:spcPts val="1820"/>
-              </a:lnSpc>
-              <a:spcBef>
-                <a:spcPts val="300"/>
-              </a:spcBef>
-              <a:spcAft>
-                <a:spcPts val="300"/>
-              </a:spcAft>
-              <a:buNone/>
-            </a:pPr>
-            <a:r>
-              <a:rPr lang="en-US" sz="1300" dirty="0">
-                <a:solidFill>
-                  <a:srgbClr val="1C2833"/>
-                </a:solidFill>
-                <a:latin typeface="Georgia" pitchFamily="34" charset="0"/>
-                <a:ea typeface="Georgia" pitchFamily="34" charset="-122"/>
-                <a:cs typeface="Georgia" pitchFamily="34" charset="-120"/>
-              </a:rPr>
-              <a:t>| Format | Best for elements ... | |--------|------------------------| | Poster (A2) | Any | | Live demo (2 min) | </a:t>
-            </a:r>
-            <a:pPr algn="l" indent="0" marL="0">
-              <a:lnSpc>
-                <a:spcPts val="1820"/>
-              </a:lnSpc>
-              <a:spcBef>
-                <a:spcPts val="300"/>
-              </a:spcBef>
-              <a:spcAft>
-                <a:spcPts val="300"/>
-              </a:spcAft>
-              <a:buNone/>
-            </a:pPr>
-            <a:r>
-              <a:rPr lang="en-US" sz="1300" i="1" dirty="0">
-                <a:solidFill>
-                  <a:srgbClr val="1C2833"/>
-                </a:solidFill>
-                <a:latin typeface="Georgia" pitchFamily="34" charset="0"/>
-                <a:ea typeface="Georgia" pitchFamily="34" charset="-122"/>
-                <a:cs typeface="Georgia" pitchFamily="34" charset="-120"/>
-              </a:rPr>
-              <a:t>tejas</a:t>
-            </a:r>
-            <a:pPr algn="l" indent="0" marL="0">
-              <a:lnSpc>
-                <a:spcPts val="1820"/>
-              </a:lnSpc>
-              <a:spcBef>
-                <a:spcPts val="300"/>
-              </a:spcBef>
-              <a:spcAft>
-                <a:spcPts val="300"/>
-              </a:spcAft>
-              <a:buNone/>
-            </a:pPr>
-            <a:r>
-              <a:rPr lang="en-US" sz="1300" dirty="0">
-                <a:solidFill>
-                  <a:srgbClr val="1C2833"/>
-                </a:solidFill>
-                <a:latin typeface="Georgia" pitchFamily="34" charset="0"/>
-                <a:ea typeface="Georgia" pitchFamily="34" charset="-122"/>
-                <a:cs typeface="Georgia" pitchFamily="34" charset="-120"/>
-              </a:rPr>
-              <a:t> (fire), </a:t>
-            </a:r>
-            <a:pPr algn="l" indent="0" marL="0">
-              <a:lnSpc>
-                <a:spcPts val="1820"/>
-              </a:lnSpc>
-              <a:spcBef>
-                <a:spcPts val="300"/>
-              </a:spcBef>
-              <a:spcAft>
-                <a:spcPts val="300"/>
-              </a:spcAft>
-              <a:buNone/>
-            </a:pPr>
-            <a:r>
-              <a:rPr lang="en-US" sz="1300" i="1" dirty="0">
-                <a:solidFill>
-                  <a:srgbClr val="1C2833"/>
-                </a:solidFill>
-                <a:latin typeface="Georgia" pitchFamily="34" charset="0"/>
-                <a:ea typeface="Georgia" pitchFamily="34" charset="-122"/>
-                <a:cs typeface="Georgia" pitchFamily="34" charset="-120"/>
-              </a:rPr>
-              <a:t>vāyu</a:t>
-            </a:r>
-            <a:pPr algn="l" indent="0" marL="0">
-              <a:lnSpc>
-                <a:spcPts val="1820"/>
-              </a:lnSpc>
-              <a:spcBef>
-                <a:spcPts val="300"/>
-              </a:spcBef>
-              <a:spcAft>
-                <a:spcPts val="300"/>
-              </a:spcAft>
-              <a:buNone/>
-            </a:pPr>
-            <a:r>
-              <a:rPr lang="en-US" sz="1300" dirty="0">
-                <a:solidFill>
-                  <a:srgbClr val="1C2833"/>
-                </a:solidFill>
-                <a:latin typeface="Georgia" pitchFamily="34" charset="0"/>
-                <a:ea typeface="Georgia" pitchFamily="34" charset="-122"/>
-                <a:cs typeface="Georgia" pitchFamily="34" charset="-120"/>
-              </a:rPr>
-              <a:t> (air) | | Short story (1 page) | Any — especially </a:t>
-            </a:r>
-            <a:pPr algn="l" indent="0" marL="0">
-              <a:lnSpc>
-                <a:spcPts val="1820"/>
-              </a:lnSpc>
-              <a:spcBef>
-                <a:spcPts val="300"/>
-              </a:spcBef>
-              <a:spcAft>
-                <a:spcPts val="300"/>
-              </a:spcAft>
-              <a:buNone/>
-            </a:pPr>
-            <a:r>
-              <a:rPr lang="en-US" sz="1300" i="1" dirty="0">
-                <a:solidFill>
-                  <a:srgbClr val="1C2833"/>
-                </a:solidFill>
-                <a:latin typeface="Georgia" pitchFamily="34" charset="0"/>
-                <a:ea typeface="Georgia" pitchFamily="34" charset="-122"/>
-                <a:cs typeface="Georgia" pitchFamily="34" charset="-120"/>
-              </a:rPr>
-              <a:t>ākāśa</a:t>
-            </a:r>
-            <a:pPr algn="l" indent="0" marL="0">
-              <a:lnSpc>
-                <a:spcPts val="1820"/>
-              </a:lnSpc>
-              <a:spcBef>
-                <a:spcPts val="300"/>
-              </a:spcBef>
-              <a:spcAft>
-                <a:spcPts val="300"/>
-              </a:spcAft>
-              <a:buNone/>
-            </a:pPr>
-            <a:r>
-              <a:rPr lang="en-US" sz="1300" dirty="0">
-                <a:solidFill>
-                  <a:srgbClr val="1C2833"/>
-                </a:solidFill>
-                <a:latin typeface="Georgia" pitchFamily="34" charset="0"/>
-                <a:ea typeface="Georgia" pitchFamily="34" charset="-122"/>
-                <a:cs typeface="Georgia" pitchFamily="34" charset="-120"/>
-              </a:rPr>
-              <a:t> | | 90-second video | Any | | Infographic | </a:t>
-            </a:r>
-            <a:pPr algn="l" indent="0" marL="0">
-              <a:lnSpc>
-                <a:spcPts val="1820"/>
-              </a:lnSpc>
-              <a:spcBef>
-                <a:spcPts val="300"/>
-              </a:spcBef>
-              <a:spcAft>
-                <a:spcPts val="300"/>
-              </a:spcAft>
-              <a:buNone/>
-            </a:pPr>
-            <a:r>
-              <a:rPr lang="en-US" sz="1300" i="1" dirty="0">
-                <a:solidFill>
-                  <a:srgbClr val="1C2833"/>
-                </a:solidFill>
-                <a:latin typeface="Georgia" pitchFamily="34" charset="0"/>
-                <a:ea typeface="Georgia" pitchFamily="34" charset="-122"/>
-                <a:cs typeface="Georgia" pitchFamily="34" charset="-120"/>
-              </a:rPr>
-              <a:t>pṛthvī</a:t>
-            </a:r>
-            <a:pPr algn="l" indent="0" marL="0">
-              <a:lnSpc>
-                <a:spcPts val="1820"/>
-              </a:lnSpc>
-              <a:spcBef>
-                <a:spcPts val="300"/>
-              </a:spcBef>
-              <a:spcAft>
-                <a:spcPts val="300"/>
-              </a:spcAft>
-              <a:buNone/>
-            </a:pPr>
-            <a:r>
-              <a:rPr lang="en-US" sz="1300" dirty="0">
-                <a:solidFill>
-                  <a:srgbClr val="1C2833"/>
-                </a:solidFill>
-                <a:latin typeface="Georgia" pitchFamily="34" charset="0"/>
-                <a:ea typeface="Georgia" pitchFamily="34" charset="-122"/>
-                <a:cs typeface="Georgia" pitchFamily="34" charset="-120"/>
-              </a:rPr>
-              <a:t>, </a:t>
-            </a:r>
-            <a:pPr algn="l" indent="0" marL="0">
-              <a:lnSpc>
-                <a:spcPts val="1820"/>
-              </a:lnSpc>
-              <a:spcBef>
-                <a:spcPts val="300"/>
-              </a:spcBef>
-              <a:spcAft>
-                <a:spcPts val="300"/>
-              </a:spcAft>
-              <a:buNone/>
-            </a:pPr>
-            <a:r>
-              <a:rPr lang="en-US" sz="1300" i="1" dirty="0">
-                <a:solidFill>
-                  <a:srgbClr val="1C2833"/>
-                </a:solidFill>
-                <a:latin typeface="Georgia" pitchFamily="34" charset="0"/>
-                <a:ea typeface="Georgia" pitchFamily="34" charset="-122"/>
-                <a:cs typeface="Georgia" pitchFamily="34" charset="-120"/>
-              </a:rPr>
-              <a:t>ap</a:t>
-            </a:r>
-            <a:pPr algn="l" indent="0" marL="0">
-              <a:lnSpc>
-                <a:spcPts val="1820"/>
-              </a:lnSpc>
-              <a:spcBef>
-                <a:spcPts val="300"/>
-              </a:spcBef>
-              <a:spcAft>
-                <a:spcPts val="300"/>
-              </a:spcAft>
-              <a:buNone/>
-            </a:pPr>
-            <a:r>
-              <a:rPr lang="en-US" sz="1300" dirty="0">
-                <a:solidFill>
-                  <a:srgbClr val="1C2833"/>
-                </a:solidFill>
-                <a:latin typeface="Georgia" pitchFamily="34" charset="0"/>
-                <a:ea typeface="Georgia" pitchFamily="34" charset="-122"/>
-                <a:cs typeface="Georgia" pitchFamily="34" charset="-120"/>
-              </a:rPr>
-              <a:t> (data-heavy) | | Original song / poem | </a:t>
-            </a:r>
-            <a:pPr algn="l" indent="0" marL="0">
-              <a:lnSpc>
-                <a:spcPts val="1820"/>
-              </a:lnSpc>
-              <a:spcBef>
-                <a:spcPts val="300"/>
-              </a:spcBef>
-              <a:spcAft>
-                <a:spcPts val="300"/>
-              </a:spcAft>
-              <a:buNone/>
-            </a:pPr>
-            <a:r>
-              <a:rPr lang="en-US" sz="1300" i="1" dirty="0">
-                <a:solidFill>
-                  <a:srgbClr val="1C2833"/>
-                </a:solidFill>
-                <a:latin typeface="Georgia" pitchFamily="34" charset="0"/>
-                <a:ea typeface="Georgia" pitchFamily="34" charset="-122"/>
-                <a:cs typeface="Georgia" pitchFamily="34" charset="-120"/>
-              </a:rPr>
-              <a:t>vāyu</a:t>
-            </a:r>
-            <a:pPr algn="l" indent="0" marL="0">
-              <a:lnSpc>
-                <a:spcPts val="1820"/>
-              </a:lnSpc>
-              <a:spcBef>
-                <a:spcPts val="300"/>
-              </a:spcBef>
-              <a:spcAft>
-                <a:spcPts val="300"/>
-              </a:spcAft>
-              <a:buNone/>
-            </a:pPr>
-            <a:r>
-              <a:rPr lang="en-US" sz="1300" dirty="0">
-                <a:solidFill>
-                  <a:srgbClr val="1C2833"/>
-                </a:solidFill>
-                <a:latin typeface="Georgia" pitchFamily="34" charset="0"/>
-                <a:ea typeface="Georgia" pitchFamily="34" charset="-122"/>
-                <a:cs typeface="Georgia" pitchFamily="34" charset="-120"/>
-              </a:rPr>
-              <a:t>, </a:t>
-            </a:r>
-            <a:pPr algn="l" indent="0" marL="0">
-              <a:lnSpc>
-                <a:spcPts val="1820"/>
-              </a:lnSpc>
-              <a:spcBef>
-                <a:spcPts val="300"/>
-              </a:spcBef>
-              <a:spcAft>
-                <a:spcPts val="300"/>
-              </a:spcAft>
-              <a:buNone/>
-            </a:pPr>
-            <a:r>
-              <a:rPr lang="en-US" sz="1300" i="1" dirty="0">
-                <a:solidFill>
-                  <a:srgbClr val="1C2833"/>
-                </a:solidFill>
-                <a:latin typeface="Georgia" pitchFamily="34" charset="0"/>
-                <a:ea typeface="Georgia" pitchFamily="34" charset="-122"/>
-                <a:cs typeface="Georgia" pitchFamily="34" charset="-120"/>
-              </a:rPr>
-              <a:t>ākāśa</a:t>
-            </a:r>
-            <a:pPr algn="l" indent="0" marL="0">
-              <a:lnSpc>
-                <a:spcPts val="1820"/>
-              </a:lnSpc>
-              <a:spcBef>
-                <a:spcPts val="300"/>
-              </a:spcBef>
-              <a:spcAft>
-                <a:spcPts val="300"/>
-              </a:spcAft>
-              <a:buNone/>
-            </a:pPr>
-            <a:r>
-              <a:rPr lang="en-US" sz="1300" dirty="0">
-                <a:solidFill>
-                  <a:srgbClr val="1C2833"/>
-                </a:solidFill>
-                <a:latin typeface="Georgia" pitchFamily="34" charset="0"/>
-                <a:ea typeface="Georgia" pitchFamily="34" charset="-122"/>
-                <a:cs typeface="Georgia" pitchFamily="34" charset="-120"/>
-              </a:rPr>
-              <a:t> |</a:t>
-            </a:r>
-            <a:endParaRPr lang="en-US" sz="1300" dirty="0"/>
-          </a:p>
-        </p:txBody>
-      </p:sp>
-      <p:sp>
-        <p:nvSpPr>
-          <p:cNvPr id="9" name="Text 7"/>
-          <p:cNvSpPr/>
-          <p:nvPr/>
-        </p:nvSpPr>
-        <p:spPr>
-          <a:xfrm>
-            <a:off x="692051" y="2343299"/>
-            <a:ext cx="7973389" cy="230981"/>
-          </a:xfrm>
-          <a:prstGeom prst="rect">
-            <a:avLst/>
-          </a:prstGeom>
-          <a:noFill/>
-          <a:ln/>
-        </p:spPr>
-        <p:txBody>
-          <a:bodyPr wrap="square" lIns="0" tIns="0" rIns="0" bIns="0" rtlCol="0" anchor="t"/>
-          <a:lstStyle/>
-          <a:p>
-            <a:pPr algn="l" indent="0" marL="0">
-              <a:lnSpc>
-                <a:spcPts val="1820"/>
-              </a:lnSpc>
-              <a:spcBef>
-                <a:spcPts val="300"/>
-              </a:spcBef>
-              <a:spcAft>
-                <a:spcPts val="300"/>
-              </a:spcAft>
-              <a:buNone/>
-            </a:pPr>
-            <a:r>
-              <a:rPr lang="en-US" sz="1300" i="1" dirty="0">
-                <a:solidFill>
-                  <a:srgbClr val="1C2833"/>
-                </a:solidFill>
-                <a:latin typeface="Georgia" pitchFamily="34" charset="0"/>
-                <a:ea typeface="Georgia" pitchFamily="34" charset="-122"/>
-                <a:cs typeface="Georgia" pitchFamily="34" charset="-120"/>
-              </a:rPr>
-              <a:t>You'll work in pairs or alone. Decide today.</a:t>
-            </a:r>
-            <a:endParaRPr lang="en-US" sz="1300" dirty="0"/>
-          </a:p>
-        </p:txBody>
-      </p:sp>
-      <p:sp>
-        <p:nvSpPr>
-          <p:cNvPr id="10" name="Text 8"/>
+            <a:pPr algn="l" marL="342900" indent="-342900">
+              <a:lnSpc>
+                <a:spcPts val="1620"/>
+              </a:lnSpc>
+              <a:spcAft>
+                <a:spcPts val="300"/>
+              </a:spcAft>
+              <a:buSzPct val="100000"/>
+              <a:buChar char="•"/>
+            </a:pPr>
+            <a:r>
+              <a:rPr lang="en-US" sz="1200" dirty="0">
+                <a:solidFill>
+                  <a:srgbClr val="1C2833"/>
+                </a:solidFill>
+                <a:latin typeface="Arial" pitchFamily="34" charset="0"/>
+                <a:ea typeface="Arial" pitchFamily="34" charset="-122"/>
+                <a:cs typeface="Arial" pitchFamily="34" charset="-120"/>
+              </a:rPr>
+              <a:t>The board is a snapshot of the class's project distribution. Note out loud: </a:t>
+            </a:r>
+            <a:pPr algn="l" indent="0" marL="0">
+              <a:lnSpc>
+                <a:spcPts val="1620"/>
+              </a:lnSpc>
+              <a:spcAft>
+                <a:spcPts val="300"/>
+              </a:spcAft>
+              <a:buNone/>
+            </a:pPr>
+            <a:r>
+              <a:rPr lang="en-US" sz="1200" i="1" dirty="0">
+                <a:solidFill>
+                  <a:srgbClr val="1C2833"/>
+                </a:solidFill>
+                <a:latin typeface="Arial" pitchFamily="34" charset="0"/>
+                <a:ea typeface="Arial" pitchFamily="34" charset="-122"/>
+                <a:cs typeface="Arial" pitchFamily="34" charset="-120"/>
+              </a:rPr>
+              <a:t>"We have 4 groups on water, only 1 on space — interesting. Group on space, you'll have a unique presentation. Water groups, find a way to make yours distinct."</a:t>
+            </a:r>
+            <a:endParaRPr lang="en-US" sz="1200" dirty="0"/>
+          </a:p>
+          <a:p>
+            <a:pPr algn="l" marL="342900" indent="-342900">
+              <a:lnSpc>
+                <a:spcPts val="1620"/>
+              </a:lnSpc>
+              <a:spcAft>
+                <a:spcPts val="300"/>
+              </a:spcAft>
+              <a:buSzPct val="100000"/>
+              <a:buChar char="•"/>
+            </a:pPr>
+            <a:r>
+              <a:rPr lang="en-US" sz="1200" dirty="0">
+                <a:solidFill>
+                  <a:srgbClr val="1C2833"/>
+                </a:solidFill>
+                <a:latin typeface="Arial" pitchFamily="34" charset="0"/>
+                <a:ea typeface="Arial" pitchFamily="34" charset="-122"/>
+                <a:cs typeface="Arial" pitchFamily="34" charset="-120"/>
+              </a:rPr>
+              <a:t>Preview Day 6: "Tomorrow we leave Sanskrit for a day and look at the modern science framework — and ask which one is 'right.'"</a:t>
+            </a:r>
+            <a:endParaRPr lang="en-US" sz="1200" dirty="0"/>
+          </a:p>
+        </p:txBody>
+      </p:sp>
+      <p:sp>
+        <p:nvSpPr>
+          <p:cNvPr id="5" name="Text 3"/>
           <p:cNvSpPr/>
           <p:nvPr/>
         </p:nvSpPr>
@@ -5454,7 +5329,7 @@
                 <a:ea typeface="Georgia" pitchFamily="34" charset="-122"/>
                 <a:cs typeface="Georgia" pitchFamily="34" charset="-120"/>
               </a:rPr>
-              <a:t>Homework</a:t>
+              <a:t>Student-facing content</a:t>
             </a:r>
             <a:endParaRPr lang="en-US" sz="1800" dirty="0"/>
           </a:p>
@@ -5468,8 +5343,61 @@
         </p:nvSpPr>
         <p:spPr>
           <a:xfrm>
-            <a:off x="406301" y="870942"/>
-            <a:ext cx="8498026" cy="426541"/>
+            <a:off x="406301" y="883593"/>
+            <a:ext cx="8331398" cy="1881187"/>
+          </a:xfrm>
+          <a:prstGeom prst="rect">
+            <a:avLst/>
+          </a:prstGeom>
+          <a:solidFill>
+            <a:srgbClr val="F4F8F9"/>
+          </a:solidFill>
+          <a:ln/>
+        </p:spPr>
+        <p:txBody>
+          <a:bodyPr wrap="square" rtlCol="0" anchor="ctr"/>
+          <a:lstStyle/>
+          <a:p>
+            <a:pPr indent="0" marL="0">
+              <a:buNone/>
+            </a:pPr>
+            <a:endParaRPr lang="en-US" dirty="0"/>
+          </a:p>
+        </p:txBody>
+      </p:sp>
+      <p:sp>
+        <p:nvSpPr>
+          <p:cNvPr id="5" name="Shape 3"/>
+          <p:cNvSpPr/>
+          <p:nvPr/>
+        </p:nvSpPr>
+        <p:spPr>
+          <a:xfrm>
+            <a:off x="434876" y="883593"/>
+            <a:ext cx="0" cy="1881187"/>
+          </a:xfrm>
+          <a:prstGeom prst="line">
+            <a:avLst/>
+          </a:prstGeom>
+          <a:noFill/>
+          <a:ln w="57150">
+            <a:solidFill>
+              <a:srgbClr val="FE4447"/>
+            </a:solidFill>
+            <a:prstDash val="solid"/>
+          </a:ln>
+        </p:spPr>
+      </p:sp>
+      <p:sp>
+        <p:nvSpPr>
+          <p:cNvPr id="6" name="Text 4"/>
+          <p:cNvSpPr/>
+          <p:nvPr/>
+        </p:nvSpPr>
+        <p:spPr>
+          <a:xfrm>
+            <a:off x="692051" y="1074093"/>
+            <a:ext cx="7973389" cy="230981"/>
           </a:xfrm>
           <a:prstGeom prst="rect">
             <a:avLst/>
@@ -5483,7 +5411,7 @@
           <a:p>
             <a:pPr algn="l" indent="0" marL="0">
               <a:lnSpc>
-                <a:spcPts val="1680"/>
+                <a:spcPts val="1820"/>
               </a:lnSpc>
               <a:spcBef>
                 <a:spcPts val="300"/>
@@ -5494,23 +5422,512 @@
               <a:buNone/>
             </a:pPr>
             <a:r>
-              <a:rPr lang="en-US" sz="1200" dirty="0">
-                <a:solidFill>
-                  <a:srgbClr val="1C2833"/>
-                </a:solidFill>
-                <a:latin typeface="Arial" pitchFamily="34" charset="0"/>
-                <a:ea typeface="Arial" pitchFamily="34" charset="-122"/>
-                <a:cs typeface="Arial" pitchFamily="34" charset="-120"/>
-              </a:rPr>
-              <a:t>– Submit project plan in writing by next morning. Format: 1 paragraph stating element, format, and what audience will see/hear/feel. – Begin gathering project materials.</a:t>
-            </a:r>
-            <a:endParaRPr lang="en-US" sz="1200" dirty="0"/>
-          </a:p>
-        </p:txBody>
-      </p:sp>
-      <p:sp>
-        <p:nvSpPr>
-          <p:cNvPr id="5" name="Text 3"/>
+              <a:rPr lang="en-US" sz="1300" b="1" i="1" dirty="0">
+                <a:solidFill>
+                  <a:srgbClr val="1C2833"/>
+                </a:solidFill>
+                <a:latin typeface="Georgia" pitchFamily="34" charset="0"/>
+                <a:ea typeface="Georgia" pitchFamily="34" charset="-122"/>
+                <a:cs typeface="Georgia" pitchFamily="34" charset="-120"/>
+              </a:rPr>
+              <a:t>Mid-module check</a:t>
+            </a:r>
+            <a:pPr algn="l" indent="0" marL="0">
+              <a:lnSpc>
+                <a:spcPts val="1820"/>
+              </a:lnSpc>
+              <a:spcBef>
+                <a:spcPts val="300"/>
+              </a:spcBef>
+              <a:spcAft>
+                <a:spcPts val="300"/>
+              </a:spcAft>
+              <a:buNone/>
+            </a:pPr>
+            <a:r>
+              <a:rPr lang="en-US" sz="1300" dirty="0">
+                <a:solidFill>
+                  <a:srgbClr val="1C2833"/>
+                </a:solidFill>
+                <a:latin typeface="Georgia" pitchFamily="34" charset="0"/>
+                <a:ea typeface="Georgia" pitchFamily="34" charset="-122"/>
+                <a:cs typeface="Georgia" pitchFamily="34" charset="-120"/>
+              </a:rPr>
+              <a:t> — you'll take a short quiz today and choose your project.</a:t>
+            </a:r>
+            <a:endParaRPr lang="en-US" sz="1300" dirty="0"/>
+          </a:p>
+        </p:txBody>
+      </p:sp>
+      <p:sp>
+        <p:nvSpPr>
+          <p:cNvPr id="7" name="Text 5"/>
+          <p:cNvSpPr/>
+          <p:nvPr/>
+        </p:nvSpPr>
+        <p:spPr>
+          <a:xfrm>
+            <a:off x="692051" y="1343174"/>
+            <a:ext cx="7973389" cy="230981"/>
+          </a:xfrm>
+          <a:prstGeom prst="rect">
+            <a:avLst/>
+          </a:prstGeom>
+          <a:noFill/>
+          <a:ln/>
+        </p:spPr>
+        <p:txBody>
+          <a:bodyPr wrap="square" lIns="0" tIns="0" rIns="0" bIns="0" rtlCol="0" anchor="t"/>
+          <a:lstStyle/>
+          <a:p>
+            <a:pPr algn="l" indent="0" marL="0">
+              <a:lnSpc>
+                <a:spcPts val="1820"/>
+              </a:lnSpc>
+              <a:spcBef>
+                <a:spcPts val="300"/>
+              </a:spcBef>
+              <a:spcAft>
+                <a:spcPts val="300"/>
+              </a:spcAft>
+              <a:buNone/>
+            </a:pPr>
+            <a:r>
+              <a:rPr lang="en-US" sz="1300" i="1" dirty="0">
+                <a:solidFill>
+                  <a:srgbClr val="1C2833"/>
+                </a:solidFill>
+                <a:latin typeface="Georgia" pitchFamily="34" charset="0"/>
+                <a:ea typeface="Georgia" pitchFamily="34" charset="-122"/>
+                <a:cs typeface="Georgia" pitchFamily="34" charset="-120"/>
+              </a:rPr>
+              <a:t>Project options for your final assignment (Days 8–10):</a:t>
+            </a:r>
+            <a:endParaRPr lang="en-US" sz="1300" dirty="0"/>
+          </a:p>
+        </p:txBody>
+      </p:sp>
+      <p:sp>
+        <p:nvSpPr>
+          <p:cNvPr id="8" name="Text 6"/>
+          <p:cNvSpPr/>
+          <p:nvPr/>
+        </p:nvSpPr>
+        <p:spPr>
+          <a:xfrm>
+            <a:off x="692051" y="1612255"/>
+            <a:ext cx="7973389" cy="692944"/>
+          </a:xfrm>
+          <a:prstGeom prst="rect">
+            <a:avLst/>
+          </a:prstGeom>
+          <a:noFill/>
+          <a:ln/>
+        </p:spPr>
+        <p:txBody>
+          <a:bodyPr wrap="square" lIns="0" tIns="0" rIns="0" bIns="0" rtlCol="0" anchor="t"/>
+          <a:lstStyle/>
+          <a:p>
+            <a:pPr algn="l" indent="0" marL="0">
+              <a:lnSpc>
+                <a:spcPts val="1820"/>
+              </a:lnSpc>
+              <a:spcBef>
+                <a:spcPts val="300"/>
+              </a:spcBef>
+              <a:spcAft>
+                <a:spcPts val="300"/>
+              </a:spcAft>
+              <a:buNone/>
+            </a:pPr>
+            <a:r>
+              <a:rPr lang="en-US" sz="1300" dirty="0">
+                <a:solidFill>
+                  <a:srgbClr val="1C2833"/>
+                </a:solidFill>
+                <a:latin typeface="Georgia" pitchFamily="34" charset="0"/>
+                <a:ea typeface="Georgia" pitchFamily="34" charset="-122"/>
+                <a:cs typeface="Georgia" pitchFamily="34" charset="-120"/>
+              </a:rPr>
+              <a:t>| Format | Best for elements ... | |--------|------------------------| | Poster (A2) | Any | | Live demo (2 min) | </a:t>
+            </a:r>
+            <a:pPr algn="l" indent="0" marL="0">
+              <a:lnSpc>
+                <a:spcPts val="1820"/>
+              </a:lnSpc>
+              <a:spcBef>
+                <a:spcPts val="300"/>
+              </a:spcBef>
+              <a:spcAft>
+                <a:spcPts val="300"/>
+              </a:spcAft>
+              <a:buNone/>
+            </a:pPr>
+            <a:r>
+              <a:rPr lang="en-US" sz="1300" i="1" dirty="0">
+                <a:solidFill>
+                  <a:srgbClr val="1C2833"/>
+                </a:solidFill>
+                <a:latin typeface="Georgia" pitchFamily="34" charset="0"/>
+                <a:ea typeface="Georgia" pitchFamily="34" charset="-122"/>
+                <a:cs typeface="Georgia" pitchFamily="34" charset="-120"/>
+              </a:rPr>
+              <a:t>tejas</a:t>
+            </a:r>
+            <a:pPr algn="l" indent="0" marL="0">
+              <a:lnSpc>
+                <a:spcPts val="1820"/>
+              </a:lnSpc>
+              <a:spcBef>
+                <a:spcPts val="300"/>
+              </a:spcBef>
+              <a:spcAft>
+                <a:spcPts val="300"/>
+              </a:spcAft>
+              <a:buNone/>
+            </a:pPr>
+            <a:r>
+              <a:rPr lang="en-US" sz="1300" dirty="0">
+                <a:solidFill>
+                  <a:srgbClr val="1C2833"/>
+                </a:solidFill>
+                <a:latin typeface="Georgia" pitchFamily="34" charset="0"/>
+                <a:ea typeface="Georgia" pitchFamily="34" charset="-122"/>
+                <a:cs typeface="Georgia" pitchFamily="34" charset="-120"/>
+              </a:rPr>
+              <a:t> (fire), </a:t>
+            </a:r>
+            <a:pPr algn="l" indent="0" marL="0">
+              <a:lnSpc>
+                <a:spcPts val="1820"/>
+              </a:lnSpc>
+              <a:spcBef>
+                <a:spcPts val="300"/>
+              </a:spcBef>
+              <a:spcAft>
+                <a:spcPts val="300"/>
+              </a:spcAft>
+              <a:buNone/>
+            </a:pPr>
+            <a:r>
+              <a:rPr lang="en-US" sz="1300" i="1" dirty="0">
+                <a:solidFill>
+                  <a:srgbClr val="1C2833"/>
+                </a:solidFill>
+                <a:latin typeface="Georgia" pitchFamily="34" charset="0"/>
+                <a:ea typeface="Georgia" pitchFamily="34" charset="-122"/>
+                <a:cs typeface="Georgia" pitchFamily="34" charset="-120"/>
+              </a:rPr>
+              <a:t>vāyu</a:t>
+            </a:r>
+            <a:pPr algn="l" indent="0" marL="0">
+              <a:lnSpc>
+                <a:spcPts val="1820"/>
+              </a:lnSpc>
+              <a:spcBef>
+                <a:spcPts val="300"/>
+              </a:spcBef>
+              <a:spcAft>
+                <a:spcPts val="300"/>
+              </a:spcAft>
+              <a:buNone/>
+            </a:pPr>
+            <a:r>
+              <a:rPr lang="en-US" sz="1300" dirty="0">
+                <a:solidFill>
+                  <a:srgbClr val="1C2833"/>
+                </a:solidFill>
+                <a:latin typeface="Georgia" pitchFamily="34" charset="0"/>
+                <a:ea typeface="Georgia" pitchFamily="34" charset="-122"/>
+                <a:cs typeface="Georgia" pitchFamily="34" charset="-120"/>
+              </a:rPr>
+              <a:t> (air) | | Short story (1 page) | Any — especially </a:t>
+            </a:r>
+            <a:pPr algn="l" indent="0" marL="0">
+              <a:lnSpc>
+                <a:spcPts val="1820"/>
+              </a:lnSpc>
+              <a:spcBef>
+                <a:spcPts val="300"/>
+              </a:spcBef>
+              <a:spcAft>
+                <a:spcPts val="300"/>
+              </a:spcAft>
+              <a:buNone/>
+            </a:pPr>
+            <a:r>
+              <a:rPr lang="en-US" sz="1300" i="1" dirty="0">
+                <a:solidFill>
+                  <a:srgbClr val="1C2833"/>
+                </a:solidFill>
+                <a:latin typeface="Georgia" pitchFamily="34" charset="0"/>
+                <a:ea typeface="Georgia" pitchFamily="34" charset="-122"/>
+                <a:cs typeface="Georgia" pitchFamily="34" charset="-120"/>
+              </a:rPr>
+              <a:t>ākāśa</a:t>
+            </a:r>
+            <a:pPr algn="l" indent="0" marL="0">
+              <a:lnSpc>
+                <a:spcPts val="1820"/>
+              </a:lnSpc>
+              <a:spcBef>
+                <a:spcPts val="300"/>
+              </a:spcBef>
+              <a:spcAft>
+                <a:spcPts val="300"/>
+              </a:spcAft>
+              <a:buNone/>
+            </a:pPr>
+            <a:r>
+              <a:rPr lang="en-US" sz="1300" dirty="0">
+                <a:solidFill>
+                  <a:srgbClr val="1C2833"/>
+                </a:solidFill>
+                <a:latin typeface="Georgia" pitchFamily="34" charset="0"/>
+                <a:ea typeface="Georgia" pitchFamily="34" charset="-122"/>
+                <a:cs typeface="Georgia" pitchFamily="34" charset="-120"/>
+              </a:rPr>
+              <a:t> | | 90-second video | Any | | Infographic | </a:t>
+            </a:r>
+            <a:pPr algn="l" indent="0" marL="0">
+              <a:lnSpc>
+                <a:spcPts val="1820"/>
+              </a:lnSpc>
+              <a:spcBef>
+                <a:spcPts val="300"/>
+              </a:spcBef>
+              <a:spcAft>
+                <a:spcPts val="300"/>
+              </a:spcAft>
+              <a:buNone/>
+            </a:pPr>
+            <a:r>
+              <a:rPr lang="en-US" sz="1300" i="1" dirty="0">
+                <a:solidFill>
+                  <a:srgbClr val="1C2833"/>
+                </a:solidFill>
+                <a:latin typeface="Georgia" pitchFamily="34" charset="0"/>
+                <a:ea typeface="Georgia" pitchFamily="34" charset="-122"/>
+                <a:cs typeface="Georgia" pitchFamily="34" charset="-120"/>
+              </a:rPr>
+              <a:t>pṛthvī</a:t>
+            </a:r>
+            <a:pPr algn="l" indent="0" marL="0">
+              <a:lnSpc>
+                <a:spcPts val="1820"/>
+              </a:lnSpc>
+              <a:spcBef>
+                <a:spcPts val="300"/>
+              </a:spcBef>
+              <a:spcAft>
+                <a:spcPts val="300"/>
+              </a:spcAft>
+              <a:buNone/>
+            </a:pPr>
+            <a:r>
+              <a:rPr lang="en-US" sz="1300" dirty="0">
+                <a:solidFill>
+                  <a:srgbClr val="1C2833"/>
+                </a:solidFill>
+                <a:latin typeface="Georgia" pitchFamily="34" charset="0"/>
+                <a:ea typeface="Georgia" pitchFamily="34" charset="-122"/>
+                <a:cs typeface="Georgia" pitchFamily="34" charset="-120"/>
+              </a:rPr>
+              <a:t>, </a:t>
+            </a:r>
+            <a:pPr algn="l" indent="0" marL="0">
+              <a:lnSpc>
+                <a:spcPts val="1820"/>
+              </a:lnSpc>
+              <a:spcBef>
+                <a:spcPts val="300"/>
+              </a:spcBef>
+              <a:spcAft>
+                <a:spcPts val="300"/>
+              </a:spcAft>
+              <a:buNone/>
+            </a:pPr>
+            <a:r>
+              <a:rPr lang="en-US" sz="1300" i="1" dirty="0">
+                <a:solidFill>
+                  <a:srgbClr val="1C2833"/>
+                </a:solidFill>
+                <a:latin typeface="Georgia" pitchFamily="34" charset="0"/>
+                <a:ea typeface="Georgia" pitchFamily="34" charset="-122"/>
+                <a:cs typeface="Georgia" pitchFamily="34" charset="-120"/>
+              </a:rPr>
+              <a:t>ap</a:t>
+            </a:r>
+            <a:pPr algn="l" indent="0" marL="0">
+              <a:lnSpc>
+                <a:spcPts val="1820"/>
+              </a:lnSpc>
+              <a:spcBef>
+                <a:spcPts val="300"/>
+              </a:spcBef>
+              <a:spcAft>
+                <a:spcPts val="300"/>
+              </a:spcAft>
+              <a:buNone/>
+            </a:pPr>
+            <a:r>
+              <a:rPr lang="en-US" sz="1300" dirty="0">
+                <a:solidFill>
+                  <a:srgbClr val="1C2833"/>
+                </a:solidFill>
+                <a:latin typeface="Georgia" pitchFamily="34" charset="0"/>
+                <a:ea typeface="Georgia" pitchFamily="34" charset="-122"/>
+                <a:cs typeface="Georgia" pitchFamily="34" charset="-120"/>
+              </a:rPr>
+              <a:t> (data-heavy) | | Original song / poem | </a:t>
+            </a:r>
+            <a:pPr algn="l" indent="0" marL="0">
+              <a:lnSpc>
+                <a:spcPts val="1820"/>
+              </a:lnSpc>
+              <a:spcBef>
+                <a:spcPts val="300"/>
+              </a:spcBef>
+              <a:spcAft>
+                <a:spcPts val="300"/>
+              </a:spcAft>
+              <a:buNone/>
+            </a:pPr>
+            <a:r>
+              <a:rPr lang="en-US" sz="1300" i="1" dirty="0">
+                <a:solidFill>
+                  <a:srgbClr val="1C2833"/>
+                </a:solidFill>
+                <a:latin typeface="Georgia" pitchFamily="34" charset="0"/>
+                <a:ea typeface="Georgia" pitchFamily="34" charset="-122"/>
+                <a:cs typeface="Georgia" pitchFamily="34" charset="-120"/>
+              </a:rPr>
+              <a:t>vāyu</a:t>
+            </a:r>
+            <a:pPr algn="l" indent="0" marL="0">
+              <a:lnSpc>
+                <a:spcPts val="1820"/>
+              </a:lnSpc>
+              <a:spcBef>
+                <a:spcPts val="300"/>
+              </a:spcBef>
+              <a:spcAft>
+                <a:spcPts val="300"/>
+              </a:spcAft>
+              <a:buNone/>
+            </a:pPr>
+            <a:r>
+              <a:rPr lang="en-US" sz="1300" dirty="0">
+                <a:solidFill>
+                  <a:srgbClr val="1C2833"/>
+                </a:solidFill>
+                <a:latin typeface="Georgia" pitchFamily="34" charset="0"/>
+                <a:ea typeface="Georgia" pitchFamily="34" charset="-122"/>
+                <a:cs typeface="Georgia" pitchFamily="34" charset="-120"/>
+              </a:rPr>
+              <a:t>, </a:t>
+            </a:r>
+            <a:pPr algn="l" indent="0" marL="0">
+              <a:lnSpc>
+                <a:spcPts val="1820"/>
+              </a:lnSpc>
+              <a:spcBef>
+                <a:spcPts val="300"/>
+              </a:spcBef>
+              <a:spcAft>
+                <a:spcPts val="300"/>
+              </a:spcAft>
+              <a:buNone/>
+            </a:pPr>
+            <a:r>
+              <a:rPr lang="en-US" sz="1300" i="1" dirty="0">
+                <a:solidFill>
+                  <a:srgbClr val="1C2833"/>
+                </a:solidFill>
+                <a:latin typeface="Georgia" pitchFamily="34" charset="0"/>
+                <a:ea typeface="Georgia" pitchFamily="34" charset="-122"/>
+                <a:cs typeface="Georgia" pitchFamily="34" charset="-120"/>
+              </a:rPr>
+              <a:t>ākāśa</a:t>
+            </a:r>
+            <a:pPr algn="l" indent="0" marL="0">
+              <a:lnSpc>
+                <a:spcPts val="1820"/>
+              </a:lnSpc>
+              <a:spcBef>
+                <a:spcPts val="300"/>
+              </a:spcBef>
+              <a:spcAft>
+                <a:spcPts val="300"/>
+              </a:spcAft>
+              <a:buNone/>
+            </a:pPr>
+            <a:r>
+              <a:rPr lang="en-US" sz="1300" dirty="0">
+                <a:solidFill>
+                  <a:srgbClr val="1C2833"/>
+                </a:solidFill>
+                <a:latin typeface="Georgia" pitchFamily="34" charset="0"/>
+                <a:ea typeface="Georgia" pitchFamily="34" charset="-122"/>
+                <a:cs typeface="Georgia" pitchFamily="34" charset="-120"/>
+              </a:rPr>
+              <a:t> |</a:t>
+            </a:r>
+            <a:endParaRPr lang="en-US" sz="1300" dirty="0"/>
+          </a:p>
+        </p:txBody>
+      </p:sp>
+      <p:sp>
+        <p:nvSpPr>
+          <p:cNvPr id="9" name="Text 7"/>
+          <p:cNvSpPr/>
+          <p:nvPr/>
+        </p:nvSpPr>
+        <p:spPr>
+          <a:xfrm>
+            <a:off x="692051" y="2343299"/>
+            <a:ext cx="7973389" cy="230981"/>
+          </a:xfrm>
+          <a:prstGeom prst="rect">
+            <a:avLst/>
+          </a:prstGeom>
+          <a:noFill/>
+          <a:ln/>
+        </p:spPr>
+        <p:txBody>
+          <a:bodyPr wrap="square" lIns="0" tIns="0" rIns="0" bIns="0" rtlCol="0" anchor="t"/>
+          <a:lstStyle/>
+          <a:p>
+            <a:pPr algn="l" indent="0" marL="0">
+              <a:lnSpc>
+                <a:spcPts val="1820"/>
+              </a:lnSpc>
+              <a:spcBef>
+                <a:spcPts val="300"/>
+              </a:spcBef>
+              <a:spcAft>
+                <a:spcPts val="300"/>
+              </a:spcAft>
+              <a:buNone/>
+            </a:pPr>
+            <a:r>
+              <a:rPr lang="en-US" sz="1300" i="1" dirty="0">
+                <a:solidFill>
+                  <a:srgbClr val="1C2833"/>
+                </a:solidFill>
+                <a:latin typeface="Georgia" pitchFamily="34" charset="0"/>
+                <a:ea typeface="Georgia" pitchFamily="34" charset="-122"/>
+                <a:cs typeface="Georgia" pitchFamily="34" charset="-120"/>
+              </a:rPr>
+              <a:t>You'll work in pairs or alone. Decide today.</a:t>
+            </a:r>
+            <a:endParaRPr lang="en-US" sz="1300" dirty="0"/>
+          </a:p>
+        </p:txBody>
+      </p:sp>
+      <p:sp>
+        <p:nvSpPr>
+          <p:cNvPr id="10" name="Text 8"/>
           <p:cNvSpPr/>
           <p:nvPr/>
         </p:nvSpPr>
